--- a/presentation/undroidwish-apple-silicon.pptx
+++ b/presentation/undroidwish-apple-silicon.pptx
@@ -4,9 +4,6 @@
   <p:sldMasterIdLst>
     <p:sldMasterId id="2147483648" r:id="rId1"/>
   </p:sldMasterIdLst>
-  <p:notesMasterIdLst>
-    <p:notesMasterId r:id="rId15"/>
-  </p:notesMasterIdLst>
   <p:sldIdLst>
     <p:sldId id="256" r:id="rId2"/>
     <p:sldId id="257" r:id="rId3"/>
@@ -22,7 +19,10 @@
     <p:sldId id="267" r:id="rId13"/>
     <p:sldId id="268" r:id="rId14"/>
   </p:sldIdLst>
-  <p:sldSz cx="9144000" cy="5143500" type="screen16x9"/>
+  <p:notesMasterIdLst>
+    <p:notesMasterId r:id="rId15"/>
+  </p:notesMasterIdLst>
+  <p:sldSz cx="9144000" cy="5143500"/>
   <p:notesSz cx="5143500" cy="9144000"/>
   <p:defaultTextStyle>
     <a:lvl1pPr marL="0" algn="l" defTabSz="914400" rtl="0" eaLnBrk="1" latinLnBrk="0" hangingPunct="1">
@@ -116,11 +116,6 @@
       </a:defRPr>
     </a:lvl9pPr>
   </p:defaultTextStyle>
-  <p:extLst>
-    <p:ext uri="{EFAFB233-063F-42B5-8137-9DF3F51BA10A}">
-      <p15:sldGuideLst xmlns:p15="http://schemas.microsoft.com/office/powerpoint/2012/main"/>
-    </p:ext>
-  </p:extLst>
 </p:presentation>
 </file>
 
@@ -146,10 +141,234 @@
           <a:chExt cx="0" cy="0"/>
         </a:xfrm>
       </p:grpSpPr>
+      <p:sp>
+        <p:nvSpPr>
+          <p:cNvPr id="2" name="Header Placeholder 1"/>
+          <p:cNvSpPr>
+            <a:spLocks noGrp="1"/>
+          </p:cNvSpPr>
+          <p:nvPr>
+            <p:ph type="hdr" sz="quarter"/>
+          </p:nvPr>
+        </p:nvSpPr>
+        <p:spPr>
+          <a:xfrm>
+            <a:off x="0" y="0"/>
+            <a:ext cx="2971800" cy="458788"/>
+          </a:xfrm>
+          <a:prstGeom prst="rect">
+            <a:avLst/>
+          </a:prstGeom>
+        </p:spPr>
+        <p:txBody>
+          <a:bodyPr vert="horz" lIns="91440" tIns="45720" rIns="91440" bIns="45720" rtlCol="0"/>
+          <a:lstStyle>
+            <a:lvl1pPr algn="l">
+              <a:defRPr sz="1200"/>
+            </a:lvl1pPr>
+          </a:lstStyle>
+          <a:p>
+            <a:endParaRPr lang="en-US"/>
+          </a:p>
+        </p:txBody>
+      </p:sp>
+      <p:sp>
+        <p:nvSpPr>
+          <p:cNvPr id="3" name="Date Placeholder 2"/>
+          <p:cNvSpPr>
+            <a:spLocks noGrp="1"/>
+          </p:cNvSpPr>
+          <p:nvPr>
+            <p:ph type="dt" idx="1"/>
+          </p:nvPr>
+        </p:nvSpPr>
+        <p:spPr>
+          <a:xfrm>
+            <a:off x="3884613" y="0"/>
+            <a:ext cx="2971800" cy="458788"/>
+          </a:xfrm>
+          <a:prstGeom prst="rect">
+            <a:avLst/>
+          </a:prstGeom>
+        </p:spPr>
+        <p:txBody>
+          <a:bodyPr vert="horz" lIns="91440" tIns="45720" rIns="91440" bIns="45720" rtlCol="0"/>
+          <a:lstStyle>
+            <a:lvl1pPr algn="r">
+              <a:defRPr sz="1200"/>
+            </a:lvl1pPr>
+          </a:lstStyle>
+          <a:p>
+            <a:fld id="{5282F153-3F37-0F45-9E97-73ACFA13230C}" type="datetimeFigureOut">
+              <a:rPr lang="en-US"/>
+              <a:t>7/23/19</a:t>
+            </a:fld>
+            <a:endParaRPr lang="en-US"/>
+          </a:p>
+        </p:txBody>
+      </p:sp>
+      <p:sp>
+        <p:nvSpPr>
+          <p:cNvPr id="4" name="Slide Image Placeholder 3"/>
+          <p:cNvSpPr>
+            <a:spLocks noGrp="1" noRot="1" noChangeAspect="1"/>
+          </p:cNvSpPr>
+          <p:nvPr>
+            <p:ph type="sldImg" idx="2"/>
+          </p:nvPr>
+        </p:nvSpPr>
+        <p:spPr>
+          <a:xfrm>
+            <a:off x="685800" y="1143000"/>
+            <a:ext cx="5486400" cy="3086100"/>
+          </a:xfrm>
+          <a:prstGeom prst="rect">
+            <a:avLst/>
+          </a:prstGeom>
+          <a:noFill/>
+          <a:ln w="12700">
+            <a:solidFill>
+              <a:prstClr val="black"/>
+            </a:solidFill>
+          </a:ln>
+        </p:spPr>
+        <p:txBody>
+          <a:bodyPr vert="horz" lIns="91440" tIns="45720" rIns="91440" bIns="45720" rtlCol="0" anchor="ctr"/>
+          <a:lstStyle/>
+          <a:p>
+            <a:endParaRPr lang="en-US"/>
+          </a:p>
+        </p:txBody>
+      </p:sp>
+      <p:sp>
+        <p:nvSpPr>
+          <p:cNvPr id="5" name="Notes Placeholder 4"/>
+          <p:cNvSpPr>
+            <a:spLocks noGrp="1"/>
+          </p:cNvSpPr>
+          <p:nvPr>
+            <p:ph type="body" sz="quarter" idx="3"/>
+          </p:nvPr>
+        </p:nvSpPr>
+        <p:spPr>
+          <a:xfrm>
+            <a:off x="685800" y="4400550"/>
+            <a:ext cx="5486400" cy="3600450"/>
+          </a:xfrm>
+          <a:prstGeom prst="rect">
+            <a:avLst/>
+          </a:prstGeom>
+        </p:spPr>
+        <p:txBody>
+          <a:bodyPr vert="horz" lIns="91440" tIns="45720" rIns="91440" bIns="45720" rtlCol="0"/>
+          <a:lstStyle/>
+          <a:p>
+            <a:pPr lvl="0"/>
+            <a:r>
+              <a:rPr lang="en-US"/>
+              <a:t>Click to edit Master text styles</a:t>
+            </a:r>
+          </a:p>
+          <a:p>
+            <a:pPr lvl="1"/>
+            <a:r>
+              <a:rPr lang="en-US"/>
+              <a:t>Second level</a:t>
+            </a:r>
+          </a:p>
+          <a:p>
+            <a:pPr lvl="2"/>
+            <a:r>
+              <a:rPr lang="en-US"/>
+              <a:t>Third level</a:t>
+            </a:r>
+          </a:p>
+          <a:p>
+            <a:pPr lvl="3"/>
+            <a:r>
+              <a:rPr lang="en-US"/>
+              <a:t>Fourth level</a:t>
+            </a:r>
+          </a:p>
+          <a:p>
+            <a:pPr lvl="4"/>
+            <a:r>
+              <a:rPr lang="en-US"/>
+              <a:t>Fifth level</a:t>
+            </a:r>
+          </a:p>
+        </p:txBody>
+      </p:sp>
+      <p:sp>
+        <p:nvSpPr>
+          <p:cNvPr id="6" name="Footer Placeholder 5"/>
+          <p:cNvSpPr>
+            <a:spLocks noGrp="1"/>
+          </p:cNvSpPr>
+          <p:nvPr>
+            <p:ph type="ftr" sz="quarter" idx="4"/>
+          </p:nvPr>
+        </p:nvSpPr>
+        <p:spPr>
+          <a:xfrm>
+            <a:off x="0" y="8685213"/>
+            <a:ext cx="2971800" cy="458787"/>
+          </a:xfrm>
+          <a:prstGeom prst="rect">
+            <a:avLst/>
+          </a:prstGeom>
+        </p:spPr>
+        <p:txBody>
+          <a:bodyPr vert="horz" lIns="91440" tIns="45720" rIns="91440" bIns="45720" rtlCol="0" anchor="b"/>
+          <a:lstStyle>
+            <a:lvl1pPr algn="l">
+              <a:defRPr sz="1200"/>
+            </a:lvl1pPr>
+          </a:lstStyle>
+          <a:p>
+            <a:endParaRPr lang="en-US"/>
+          </a:p>
+        </p:txBody>
+      </p:sp>
+      <p:sp>
+        <p:nvSpPr>
+          <p:cNvPr id="7" name="Slide Number Placeholder 6"/>
+          <p:cNvSpPr>
+            <a:spLocks noGrp="1"/>
+          </p:cNvSpPr>
+          <p:nvPr>
+            <p:ph type="sldNum" sz="quarter" idx="5"/>
+          </p:nvPr>
+        </p:nvSpPr>
+        <p:spPr>
+          <a:xfrm>
+            <a:off x="3884613" y="8685213"/>
+            <a:ext cx="2971800" cy="458787"/>
+          </a:xfrm>
+          <a:prstGeom prst="rect">
+            <a:avLst/>
+          </a:prstGeom>
+        </p:spPr>
+        <p:txBody>
+          <a:bodyPr vert="horz" lIns="91440" tIns="45720" rIns="91440" bIns="45720" rtlCol="0" anchor="b"/>
+          <a:lstStyle>
+            <a:lvl1pPr algn="r">
+              <a:defRPr sz="1200"/>
+            </a:lvl1pPr>
+          </a:lstStyle>
+          <a:p>
+            <a:fld id="{CE5E9CC1-C706-0F49-92D6-E571CC5EEA8F}" type="slidenum">
+              <a:rPr lang="en-US"/>
+              <a:t>‹#›</a:t>
+            </a:fld>
+            <a:endParaRPr lang="en-US"/>
+          </a:p>
+        </p:txBody>
+      </p:sp>
     </p:spTree>
     <p:extLst>
       <p:ext uri="{BB962C8B-B14F-4D97-AF65-F5344CB8AC3E}">
-        <p14:creationId xmlns:p14="http://schemas.microsoft.com/office/powerpoint/2010/main" val="2850986294"/>
+        <p14:creationId xmlns:p14="http://schemas.microsoft.com/office/powerpoint/2010/main" val="1024086991"/>
       </p:ext>
     </p:extLst>
   </p:cSld>
@@ -293,6 +512,10 @@
           <a:bodyPr/>
           <a:lstStyle/>
           <a:p>
+            <a:r>
+              <a:rPr lang="en-US" dirty="0"/>
+              <a:t/>
+            </a:r>
             <a:endParaRPr lang="en-US" dirty="0"/>
           </a:p>
         </p:txBody>
@@ -377,6 +600,10 @@
           <a:bodyPr/>
           <a:lstStyle/>
           <a:p>
+            <a:r>
+              <a:rPr lang="en-US" dirty="0"/>
+              <a:t/>
+            </a:r>
             <a:endParaRPr lang="en-US" dirty="0"/>
           </a:p>
         </p:txBody>
@@ -461,6 +688,10 @@
           <a:bodyPr/>
           <a:lstStyle/>
           <a:p>
+            <a:r>
+              <a:rPr lang="en-US" dirty="0"/>
+              <a:t/>
+            </a:r>
             <a:endParaRPr lang="en-US" dirty="0"/>
           </a:p>
         </p:txBody>
@@ -545,6 +776,10 @@
           <a:bodyPr/>
           <a:lstStyle/>
           <a:p>
+            <a:r>
+              <a:rPr lang="en-US" dirty="0"/>
+              <a:t/>
+            </a:r>
             <a:endParaRPr lang="en-US" dirty="0"/>
           </a:p>
         </p:txBody>
@@ -629,6 +864,10 @@
           <a:bodyPr/>
           <a:lstStyle/>
           <a:p>
+            <a:r>
+              <a:rPr lang="en-US" dirty="0"/>
+              <a:t/>
+            </a:r>
             <a:endParaRPr lang="en-US" dirty="0"/>
           </a:p>
         </p:txBody>
@@ -713,6 +952,10 @@
           <a:bodyPr/>
           <a:lstStyle/>
           <a:p>
+            <a:r>
+              <a:rPr lang="en-US" dirty="0"/>
+              <a:t/>
+            </a:r>
             <a:endParaRPr lang="en-US" dirty="0"/>
           </a:p>
         </p:txBody>
@@ -797,6 +1040,10 @@
           <a:bodyPr/>
           <a:lstStyle/>
           <a:p>
+            <a:r>
+              <a:rPr lang="en-US" dirty="0"/>
+              <a:t/>
+            </a:r>
             <a:endParaRPr lang="en-US" dirty="0"/>
           </a:p>
         </p:txBody>
@@ -881,6 +1128,10 @@
           <a:bodyPr/>
           <a:lstStyle/>
           <a:p>
+            <a:r>
+              <a:rPr lang="en-US" dirty="0"/>
+              <a:t/>
+            </a:r>
             <a:endParaRPr lang="en-US" dirty="0"/>
           </a:p>
         </p:txBody>
@@ -965,6 +1216,10 @@
           <a:bodyPr/>
           <a:lstStyle/>
           <a:p>
+            <a:r>
+              <a:rPr lang="en-US" dirty="0"/>
+              <a:t/>
+            </a:r>
             <a:endParaRPr lang="en-US" dirty="0"/>
           </a:p>
         </p:txBody>
@@ -1049,6 +1304,10 @@
           <a:bodyPr/>
           <a:lstStyle/>
           <a:p>
+            <a:r>
+              <a:rPr lang="en-US" dirty="0"/>
+              <a:t/>
+            </a:r>
             <a:endParaRPr lang="en-US" dirty="0"/>
           </a:p>
         </p:txBody>
@@ -1133,6 +1392,10 @@
           <a:bodyPr/>
           <a:lstStyle/>
           <a:p>
+            <a:r>
+              <a:rPr lang="en-US" dirty="0"/>
+              <a:t/>
+            </a:r>
             <a:endParaRPr lang="en-US" dirty="0"/>
           </a:p>
         </p:txBody>
@@ -1217,6 +1480,10 @@
           <a:bodyPr/>
           <a:lstStyle/>
           <a:p>
+            <a:r>
+              <a:rPr lang="en-US" dirty="0"/>
+              <a:t/>
+            </a:r>
             <a:endParaRPr lang="en-US" dirty="0"/>
           </a:p>
         </p:txBody>
@@ -1301,6 +1568,10 @@
           <a:bodyPr/>
           <a:lstStyle/>
           <a:p>
+            <a:r>
+              <a:rPr lang="en-US" dirty="0"/>
+              <a:t/>
+            </a:r>
             <a:endParaRPr lang="en-US" dirty="0"/>
           </a:p>
         </p:txBody>
@@ -1374,11 +1645,6 @@
 <file path=ppt/slideMasters/slideMaster1.xml><?xml version="1.0" encoding="utf-8"?>
 <p:sldMaster xmlns:a="http://schemas.openxmlformats.org/drawingml/2006/main" xmlns:r="http://schemas.openxmlformats.org/officeDocument/2006/relationships" xmlns:p="http://schemas.openxmlformats.org/presentationml/2006/main">
   <p:cSld>
-    <p:bg>
-      <p:bgRef idx="1001">
-        <a:schemeClr val="bg1"/>
-      </p:bgRef>
-    </p:bg>
     <p:spTree>
       <p:nvGrpSpPr>
         <p:cNvPr id="1" name=""/>
@@ -1661,7 +1927,6 @@
         <a:solidFill>
           <a:srgbClr val="000000"/>
         </a:solidFill>
-        <a:effectLst/>
       </p:bgPr>
     </p:bg>
     <p:spTree>
@@ -1680,270 +1945,14 @@
       </p:grpSpPr>
       <p:sp>
         <p:nvSpPr>
-          <p:cNvPr id="2" name="Shape 0"/>
+          <p:cNvPr id="2" name="Text 0"/>
           <p:cNvSpPr/>
           <p:nvPr/>
         </p:nvSpPr>
         <p:spPr>
           <a:xfrm>
-            <a:off x="7498080" y="457200"/>
-            <a:ext cx="850392" cy="1371600"/>
-          </a:xfrm>
-          <a:prstGeom prst="line">
-            <a:avLst/>
-          </a:prstGeom>
-          <a:noFill/>
-          <a:ln w="30480">
-            <a:solidFill>
-              <a:srgbClr val="E8552D">
-                <a:alpha val="22000"/>
-              </a:srgbClr>
-            </a:solidFill>
-            <a:prstDash val="solid"/>
-          </a:ln>
-        </p:spPr>
-        <p:txBody>
-          <a:bodyPr/>
-          <a:lstStyle/>
-          <a:p>
-            <a:endParaRPr lang="en-US"/>
-          </a:p>
-        </p:txBody>
-      </p:sp>
-      <p:sp>
-        <p:nvSpPr>
-          <p:cNvPr id="3" name="Shape 1"/>
-          <p:cNvSpPr/>
-          <p:nvPr/>
-        </p:nvSpPr>
-        <p:spPr>
-          <a:xfrm>
-            <a:off x="7717536" y="676656"/>
-            <a:ext cx="411480" cy="0"/>
-          </a:xfrm>
-          <a:prstGeom prst="line">
-            <a:avLst/>
-          </a:prstGeom>
-          <a:noFill/>
-          <a:ln w="25400">
-            <a:solidFill>
-              <a:srgbClr val="E8552D">
-                <a:alpha val="22000"/>
-              </a:srgbClr>
-            </a:solidFill>
-            <a:prstDash val="solid"/>
-          </a:ln>
-        </p:spPr>
-        <p:txBody>
-          <a:bodyPr/>
-          <a:lstStyle/>
-          <a:p>
-            <a:endParaRPr lang="en-US"/>
-          </a:p>
-        </p:txBody>
-      </p:sp>
-      <p:sp>
-        <p:nvSpPr>
-          <p:cNvPr id="4" name="Shape 2"/>
-          <p:cNvSpPr/>
-          <p:nvPr/>
-        </p:nvSpPr>
-        <p:spPr>
-          <a:xfrm>
-            <a:off x="7882128" y="1005840"/>
-            <a:ext cx="411480" cy="0"/>
-          </a:xfrm>
-          <a:prstGeom prst="line">
-            <a:avLst/>
-          </a:prstGeom>
-          <a:noFill/>
-          <a:ln w="25400">
-            <a:solidFill>
-              <a:srgbClr val="E8552D">
-                <a:alpha val="22000"/>
-              </a:srgbClr>
-            </a:solidFill>
-            <a:prstDash val="solid"/>
-          </a:ln>
-        </p:spPr>
-        <p:txBody>
-          <a:bodyPr/>
-          <a:lstStyle/>
-          <a:p>
-            <a:endParaRPr lang="en-US"/>
-          </a:p>
-        </p:txBody>
-      </p:sp>
-      <p:sp>
-        <p:nvSpPr>
-          <p:cNvPr id="5" name="Shape 3"/>
-          <p:cNvSpPr/>
-          <p:nvPr/>
-        </p:nvSpPr>
-        <p:spPr>
-          <a:xfrm>
-            <a:off x="8046720" y="1335024"/>
-            <a:ext cx="384048" cy="0"/>
-          </a:xfrm>
-          <a:prstGeom prst="line">
-            <a:avLst/>
-          </a:prstGeom>
-          <a:noFill/>
-          <a:ln w="25400">
-            <a:solidFill>
-              <a:srgbClr val="E8552D">
-                <a:alpha val="22000"/>
-              </a:srgbClr>
-            </a:solidFill>
-            <a:prstDash val="solid"/>
-          </a:ln>
-        </p:spPr>
-        <p:txBody>
-          <a:bodyPr/>
-          <a:lstStyle/>
-          <a:p>
-            <a:endParaRPr lang="en-US"/>
-          </a:p>
-        </p:txBody>
-      </p:sp>
-      <p:sp>
-        <p:nvSpPr>
-          <p:cNvPr id="6" name="Shape 4"/>
-          <p:cNvSpPr/>
-          <p:nvPr/>
-        </p:nvSpPr>
-        <p:spPr>
-          <a:xfrm>
-            <a:off x="8138160" y="1280160"/>
-            <a:ext cx="510235" cy="822960"/>
-          </a:xfrm>
-          <a:prstGeom prst="line">
-            <a:avLst/>
-          </a:prstGeom>
-          <a:noFill/>
-          <a:ln w="30480">
-            <a:solidFill>
-              <a:srgbClr val="1FB3A6">
-                <a:alpha val="16000"/>
-              </a:srgbClr>
-            </a:solidFill>
-            <a:prstDash val="solid"/>
-          </a:ln>
-        </p:spPr>
-        <p:txBody>
-          <a:bodyPr/>
-          <a:lstStyle/>
-          <a:p>
-            <a:endParaRPr lang="en-US"/>
-          </a:p>
-        </p:txBody>
-      </p:sp>
-      <p:sp>
-        <p:nvSpPr>
-          <p:cNvPr id="7" name="Shape 5"/>
-          <p:cNvSpPr/>
-          <p:nvPr/>
-        </p:nvSpPr>
-        <p:spPr>
-          <a:xfrm>
-            <a:off x="8269834" y="1411834"/>
-            <a:ext cx="246888" cy="0"/>
-          </a:xfrm>
-          <a:prstGeom prst="line">
-            <a:avLst/>
-          </a:prstGeom>
-          <a:noFill/>
-          <a:ln w="25400">
-            <a:solidFill>
-              <a:srgbClr val="1FB3A6">
-                <a:alpha val="16000"/>
-              </a:srgbClr>
-            </a:solidFill>
-            <a:prstDash val="solid"/>
-          </a:ln>
-        </p:spPr>
-        <p:txBody>
-          <a:bodyPr/>
-          <a:lstStyle/>
-          <a:p>
-            <a:endParaRPr lang="en-US"/>
-          </a:p>
-        </p:txBody>
-      </p:sp>
-      <p:sp>
-        <p:nvSpPr>
-          <p:cNvPr id="8" name="Shape 6"/>
-          <p:cNvSpPr/>
-          <p:nvPr/>
-        </p:nvSpPr>
-        <p:spPr>
-          <a:xfrm>
-            <a:off x="8368589" y="1609344"/>
-            <a:ext cx="246888" cy="0"/>
-          </a:xfrm>
-          <a:prstGeom prst="line">
-            <a:avLst/>
-          </a:prstGeom>
-          <a:noFill/>
-          <a:ln w="25400">
-            <a:solidFill>
-              <a:srgbClr val="1FB3A6">
-                <a:alpha val="16000"/>
-              </a:srgbClr>
-            </a:solidFill>
-            <a:prstDash val="solid"/>
-          </a:ln>
-        </p:spPr>
-        <p:txBody>
-          <a:bodyPr/>
-          <a:lstStyle/>
-          <a:p>
-            <a:endParaRPr lang="en-US"/>
-          </a:p>
-        </p:txBody>
-      </p:sp>
-      <p:sp>
-        <p:nvSpPr>
-          <p:cNvPr id="9" name="Shape 7"/>
-          <p:cNvSpPr/>
-          <p:nvPr/>
-        </p:nvSpPr>
-        <p:spPr>
-          <a:xfrm>
-            <a:off x="8467344" y="1806854"/>
-            <a:ext cx="230429" cy="0"/>
-          </a:xfrm>
-          <a:prstGeom prst="line">
-            <a:avLst/>
-          </a:prstGeom>
-          <a:noFill/>
-          <a:ln w="25400">
-            <a:solidFill>
-              <a:srgbClr val="1FB3A6">
-                <a:alpha val="16000"/>
-              </a:srgbClr>
-            </a:solidFill>
-            <a:prstDash val="solid"/>
-          </a:ln>
-        </p:spPr>
-        <p:txBody>
-          <a:bodyPr/>
-          <a:lstStyle/>
-          <a:p>
-            <a:endParaRPr lang="en-US"/>
-          </a:p>
-        </p:txBody>
-      </p:sp>
-      <p:sp>
-        <p:nvSpPr>
-          <p:cNvPr id="10" name="Text 8"/>
-          <p:cNvSpPr/>
-          <p:nvPr/>
-        </p:nvSpPr>
-        <p:spPr>
-          <a:xfrm>
-            <a:off x="502920" y="1234440"/>
-            <a:ext cx="8138160" cy="365760"/>
+            <a:off x="502920" y="1051560"/>
+            <a:ext cx="4709160" cy="365760"/>
           </a:xfrm>
           <a:prstGeom prst="rect">
             <a:avLst/>
@@ -1955,11 +1964,11 @@
           <a:bodyPr wrap="square" lIns="0" tIns="0" rIns="0" bIns="0" rtlCol="0" anchor="ctr"/>
           <a:lstStyle/>
           <a:p>
-            <a:pPr marL="0" indent="0" algn="l">
+            <a:pPr algn="l" indent="0" marL="0">
               <a:buNone/>
             </a:pPr>
             <a:r>
-              <a:rPr lang="en-US" sz="1400" b="1" kern="0" spc="300" dirty="0">
+              <a:rPr lang="en-US" sz="1400" b="1" spc="300" kern="0" dirty="0">
                 <a:solidFill>
                   <a:srgbClr val="E8552D"/>
                 </a:solidFill>
@@ -1975,14 +1984,14 @@
       </p:sp>
       <p:sp>
         <p:nvSpPr>
-          <p:cNvPr id="11" name="Text 9"/>
+          <p:cNvPr id="3" name="Text 1"/>
           <p:cNvSpPr/>
           <p:nvPr/>
         </p:nvSpPr>
         <p:spPr>
           <a:xfrm>
-            <a:off x="502920" y="1691640"/>
-            <a:ext cx="8138160" cy="1737360"/>
+            <a:off x="502920" y="1444752"/>
+            <a:ext cx="4709160" cy="2011680"/>
           </a:xfrm>
           <a:prstGeom prst="rect">
             <a:avLst/>
@@ -1994,7 +2003,7 @@
           <a:bodyPr wrap="square" lIns="0" tIns="0" rIns="0" bIns="0" rtlCol="0" anchor="t"/>
           <a:lstStyle/>
           <a:p>
-            <a:pPr marL="0" indent="0" algn="l">
+            <a:pPr algn="l" indent="0" marL="0">
               <a:lnSpc>
                 <a:spcPct val="98000"/>
               </a:lnSpc>
@@ -2017,14 +2026,14 @@
       </p:sp>
       <p:sp>
         <p:nvSpPr>
-          <p:cNvPr id="12" name="Text 10"/>
+          <p:cNvPr id="4" name="Text 2"/>
           <p:cNvSpPr/>
           <p:nvPr/>
         </p:nvSpPr>
         <p:spPr>
           <a:xfrm>
-            <a:off x="502920" y="3429000"/>
-            <a:ext cx="7863840" cy="731520"/>
+            <a:off x="502920" y="3401568"/>
+            <a:ext cx="4709160" cy="1097280"/>
           </a:xfrm>
           <a:prstGeom prst="rect">
             <a:avLst/>
@@ -2036,14 +2045,14 @@
           <a:bodyPr wrap="square" lIns="0" tIns="0" rIns="0" bIns="0" rtlCol="0" anchor="t"/>
           <a:lstStyle/>
           <a:p>
-            <a:pPr marL="0" indent="0" algn="l">
+            <a:pPr algn="l" indent="0" marL="0">
               <a:lnSpc>
                 <a:spcPct val="105000"/>
               </a:lnSpc>
               <a:buNone/>
             </a:pPr>
             <a:r>
-              <a:rPr lang="en-US" sz="1700" dirty="0">
+              <a:rPr lang="en-US" sz="1500" dirty="0">
                 <a:solidFill>
                   <a:srgbClr val="9AA8B8"/>
                 </a:solidFill>
@@ -2053,13 +2062,71 @@
               </a:rPr>
               <a:t>Now with bluetooth and borg compatibility</a:t>
             </a:r>
-            <a:endParaRPr lang="en-US" sz="1700" dirty="0"/>
+            <a:endParaRPr lang="en-US" sz="1500" dirty="0"/>
           </a:p>
         </p:txBody>
       </p:sp>
       <p:sp>
         <p:nvSpPr>
-          <p:cNvPr id="13" name="Shape 11"/>
+          <p:cNvPr id="5" name="Shape 3"/>
+          <p:cNvSpPr/>
+          <p:nvPr/>
+        </p:nvSpPr>
+        <p:spPr>
+          <a:xfrm>
+            <a:off x="5312664" y="1124712"/>
+            <a:ext cx="3374136" cy="2660904"/>
+          </a:xfrm>
+          <a:prstGeom prst="roundRect">
+            <a:avLst>
+              <a:gd name="adj" fmla="val 2062"/>
+            </a:avLst>
+          </a:prstGeom>
+          <a:solidFill>
+            <a:srgbClr val="1E2632"/>
+          </a:solidFill>
+          <a:ln w="12700">
+            <a:solidFill>
+              <a:srgbClr val="2A3341"/>
+            </a:solidFill>
+            <a:prstDash val="solid"/>
+          </a:ln>
+          <a:effectLst>
+            <a:outerShdw sx="100000" sy="100000" kx="0" ky="0" algn="bl" rotWithShape="0" blurRad="139700" dist="38100" dir="5400000">
+              <a:srgbClr val="000000">
+                <a:alpha val="32000"/>
+              </a:srgbClr>
+            </a:outerShdw>
+          </a:effectLst>
+        </p:spPr>
+      </p:sp>
+      <p:pic>
+        <p:nvPicPr>
+          <p:cNvPr id="6" name="Image 0" descr="undroidwish arm64 running the Tk widget demo alongside the borg desktop bridge on macOS">    </p:cNvPr>
+          <p:cNvPicPr>
+            <a:picLocks noChangeAspect="1"/>
+          </p:cNvPicPr>
+          <p:nvPr/>
+        </p:nvPicPr>
+        <p:blipFill>
+          <a:blip r:embed="rId1"/>
+          <a:stretch>
+            <a:fillRect/>
+          </a:stretch>
+        </p:blipFill>
+        <p:spPr>
+          <a:xfrm>
+            <a:off x="5376672" y="1188720"/>
+            <a:ext cx="3246120" cy="2532888"/>
+          </a:xfrm>
+          <a:prstGeom prst="rect">
+            <a:avLst/>
+          </a:prstGeom>
+        </p:spPr>
+      </p:pic>
+      <p:sp>
+        <p:nvSpPr>
+          <p:cNvPr id="7" name="Shape 4"/>
           <p:cNvSpPr/>
           <p:nvPr/>
         </p:nvSpPr>
@@ -2079,17 +2146,10 @@
             <a:prstDash val="solid"/>
           </a:ln>
         </p:spPr>
-        <p:txBody>
-          <a:bodyPr/>
-          <a:lstStyle/>
-          <a:p>
-            <a:endParaRPr lang="en-US"/>
-          </a:p>
-        </p:txBody>
-      </p:sp>
-      <p:sp>
-        <p:nvSpPr>
-          <p:cNvPr id="14" name="Text 12"/>
+      </p:sp>
+      <p:sp>
+        <p:nvSpPr>
+          <p:cNvPr id="8" name="Text 5"/>
           <p:cNvSpPr/>
           <p:nvPr/>
         </p:nvSpPr>
@@ -2108,7 +2168,7 @@
           <a:bodyPr wrap="square" lIns="0" tIns="0" rIns="0" bIns="0" rtlCol="0" anchor="ctr"/>
           <a:lstStyle/>
           <a:p>
-            <a:pPr marL="0" indent="0" algn="l">
+            <a:pPr algn="l" indent="0" marL="0">
               <a:buNone/>
             </a:pPr>
             <a:r>
@@ -2122,6 +2182,9 @@
               </a:rPr>
               <a:t>John Buckman</a:t>
             </a:r>
+            <a:pPr algn="l" indent="0" marL="0">
+              <a:buNone/>
+            </a:pPr>
             <a:r>
               <a:rPr lang="en-US" sz="1300" dirty="0">
                 <a:solidFill>
@@ -2139,7 +2202,7 @@
       </p:sp>
       <p:sp>
         <p:nvSpPr>
-          <p:cNvPr id="15" name="Text 13"/>
+          <p:cNvPr id="9" name="Text 6"/>
           <p:cNvSpPr/>
           <p:nvPr/>
         </p:nvSpPr>
@@ -2158,7 +2221,7 @@
           <a:bodyPr wrap="square" lIns="0" tIns="0" rIns="0" bIns="0" rtlCol="0" anchor="ctr"/>
           <a:lstStyle/>
           <a:p>
-            <a:pPr marL="0" indent="0" algn="l">
+            <a:pPr algn="l" indent="0" marL="0">
               <a:buNone/>
             </a:pPr>
             <a:r>
@@ -2169,7 +2232,7 @@
                 <a:latin typeface="Calibri" pitchFamily="34" charset="0"/>
                 <a:ea typeface="Calibri" pitchFamily="34" charset="-122"/>
                 <a:cs typeface="Calibri" pitchFamily="34" charset="-120"/>
-                <a:hlinkClick r:id="rId3">
+                <a:hlinkClick r:id="rId2" invalidUrl="" action="" tgtFrame="" tooltip="" history="1" highlightClick="0" endSnd="0">
                   <a:extLst>
                     <a:ext uri="{A12FA001-AC4F-418D-AE19-62706E023703}">
                       <ahyp:hlinkClr xmlns:ahyp="http://schemas.microsoft.com/office/drawing/2018/hyperlinkcolor" val="tx"/>
@@ -2179,6 +2242,9 @@
               </a:rPr>
               <a:t>github.com/johnbuckman/undroidwish-arm64-batteries-included</a:t>
             </a:r>
+            <a:pPr algn="l" indent="0" marL="0">
+              <a:buNone/>
+            </a:pPr>
             <a:r>
               <a:rPr lang="en-US" sz="1250" dirty="0">
                 <a:solidFill>
@@ -2210,7 +2276,6 @@
         <a:solidFill>
           <a:srgbClr val="000000"/>
         </a:solidFill>
-        <a:effectLst/>
       </p:bgPr>
     </p:bg>
     <p:spTree>
@@ -2248,11 +2313,11 @@
           <a:bodyPr wrap="square" lIns="0" tIns="0" rIns="0" bIns="0" rtlCol="0" anchor="ctr"/>
           <a:lstStyle/>
           <a:p>
-            <a:pPr marL="0" indent="0" algn="l">
+            <a:pPr algn="l" indent="0" marL="0">
               <a:buNone/>
             </a:pPr>
             <a:r>
-              <a:rPr lang="en-US" sz="1200" b="1" kern="0" spc="250" dirty="0">
+              <a:rPr lang="en-US" sz="1200" b="1" spc="250" kern="0" dirty="0">
                 <a:solidFill>
                   <a:srgbClr val="E8552D"/>
                 </a:solidFill>
@@ -2287,7 +2352,7 @@
           <a:bodyPr wrap="square" lIns="0" tIns="0" rIns="0" bIns="0" rtlCol="0" anchor="t"/>
           <a:lstStyle/>
           <a:p>
-            <a:pPr marL="0" indent="0" algn="l">
+            <a:pPr algn="l" indent="0" marL="0">
               <a:lnSpc>
                 <a:spcPct val="98000"/>
               </a:lnSpc>
@@ -2334,20 +2399,13 @@
             <a:prstDash val="solid"/>
           </a:ln>
           <a:effectLst>
-            <a:outerShdw blurRad="101600" dist="38100" dir="5400000" algn="bl" rotWithShape="0">
+            <a:outerShdw sx="100000" sy="100000" kx="0" ky="0" algn="bl" rotWithShape="0" blurRad="101600" dist="38100" dir="5400000">
               <a:srgbClr val="000000">
                 <a:alpha val="10000"/>
               </a:srgbClr>
             </a:outerShdw>
           </a:effectLst>
         </p:spPr>
-        <p:txBody>
-          <a:bodyPr/>
-          <a:lstStyle/>
-          <a:p>
-            <a:endParaRPr lang="en-US"/>
-          </a:p>
-        </p:txBody>
       </p:sp>
       <p:sp>
         <p:nvSpPr>
@@ -2368,31 +2426,24 @@
           </a:solidFill>
           <a:ln/>
           <a:effectLst>
-            <a:outerShdw blurRad="76200" dist="25400" dir="5400000" algn="bl" rotWithShape="0">
+            <a:outerShdw sx="100000" sy="100000" kx="0" ky="0" algn="bl" rotWithShape="0" blurRad="76200" dist="25400" dir="5400000">
               <a:srgbClr val="000000">
                 <a:alpha val="18000"/>
               </a:srgbClr>
             </a:outerShdw>
           </a:effectLst>
         </p:spPr>
-        <p:txBody>
-          <a:bodyPr/>
-          <a:lstStyle/>
-          <a:p>
-            <a:endParaRPr lang="en-US"/>
-          </a:p>
-        </p:txBody>
       </p:sp>
       <p:pic>
         <p:nvPicPr>
-          <p:cNvPr id="6" name="Image 0" descr="preencoded.png"/>
+          <p:cNvPr id="6" name="Image 0" descr="preencoded.png">    </p:cNvPr>
           <p:cNvPicPr>
             <a:picLocks noChangeAspect="1"/>
           </p:cNvPicPr>
           <p:nvPr/>
         </p:nvPicPr>
         <p:blipFill>
-          <a:blip r:embed="rId3"/>
+          <a:blip r:embed="rId1"/>
           <a:stretch>
             <a:fillRect/>
           </a:stretch>
@@ -2428,7 +2479,7 @@
           <a:bodyPr wrap="square" lIns="0" tIns="0" rIns="0" bIns="0" rtlCol="0" anchor="ctr"/>
           <a:lstStyle/>
           <a:p>
-            <a:pPr marL="0" indent="0">
+            <a:pPr indent="0" marL="0">
               <a:buNone/>
             </a:pPr>
             <a:r>
@@ -2467,7 +2518,7 @@
           <a:bodyPr wrap="square" lIns="0" tIns="0" rIns="0" bIns="0" rtlCol="0" anchor="t"/>
           <a:lstStyle/>
           <a:p>
-            <a:pPr marL="203200" indent="-203200" algn="l">
+            <a:pPr algn="l" marL="203200" indent="-203200">
               <a:spcAft>
                 <a:spcPts val="700"/>
               </a:spcAft>
@@ -2488,7 +2539,7 @@
             <a:endParaRPr lang="en-US" sz="1350" dirty="0"/>
           </a:p>
           <a:p>
-            <a:pPr marL="203200" indent="-203200" algn="l">
+            <a:pPr algn="l" marL="203200" indent="-203200">
               <a:spcAft>
                 <a:spcPts val="700"/>
               </a:spcAft>
@@ -2509,7 +2560,7 @@
             <a:endParaRPr lang="en-US" sz="1350" dirty="0"/>
           </a:p>
           <a:p>
-            <a:pPr marL="203200" indent="-203200" algn="l">
+            <a:pPr algn="l" marL="203200" indent="-203200">
               <a:spcAft>
                 <a:spcPts val="700"/>
               </a:spcAft>
@@ -2530,7 +2581,7 @@
             <a:endParaRPr lang="en-US" sz="1350" dirty="0"/>
           </a:p>
           <a:p>
-            <a:pPr marL="203200" indent="-203200" algn="l">
+            <a:pPr algn="l" marL="203200" indent="-203200">
               <a:spcAft>
                 <a:spcPts val="700"/>
               </a:spcAft>
@@ -2578,20 +2629,13 @@
             <a:prstDash val="solid"/>
           </a:ln>
           <a:effectLst>
-            <a:outerShdw blurRad="101600" dist="38100" dir="5400000" algn="bl" rotWithShape="0">
+            <a:outerShdw sx="100000" sy="100000" kx="0" ky="0" algn="bl" rotWithShape="0" blurRad="101600" dist="38100" dir="5400000">
               <a:srgbClr val="000000">
                 <a:alpha val="10000"/>
               </a:srgbClr>
             </a:outerShdw>
           </a:effectLst>
         </p:spPr>
-        <p:txBody>
-          <a:bodyPr/>
-          <a:lstStyle/>
-          <a:p>
-            <a:endParaRPr lang="en-US"/>
-          </a:p>
-        </p:txBody>
       </p:sp>
       <p:sp>
         <p:nvSpPr>
@@ -2612,31 +2656,24 @@
           </a:solidFill>
           <a:ln/>
           <a:effectLst>
-            <a:outerShdw blurRad="76200" dist="25400" dir="5400000" algn="bl" rotWithShape="0">
+            <a:outerShdw sx="100000" sy="100000" kx="0" ky="0" algn="bl" rotWithShape="0" blurRad="76200" dist="25400" dir="5400000">
               <a:srgbClr val="000000">
                 <a:alpha val="18000"/>
               </a:srgbClr>
             </a:outerShdw>
           </a:effectLst>
         </p:spPr>
-        <p:txBody>
-          <a:bodyPr/>
-          <a:lstStyle/>
-          <a:p>
-            <a:endParaRPr lang="en-US"/>
-          </a:p>
-        </p:txBody>
       </p:sp>
       <p:pic>
         <p:nvPicPr>
-          <p:cNvPr id="11" name="Image 1" descr="preencoded.png"/>
+          <p:cNvPr id="11" name="Image 1" descr="preencoded.png">    </p:cNvPr>
           <p:cNvPicPr>
             <a:picLocks noChangeAspect="1"/>
           </p:cNvPicPr>
           <p:nvPr/>
         </p:nvPicPr>
         <p:blipFill>
-          <a:blip r:embed="rId4"/>
+          <a:blip r:embed="rId2"/>
           <a:stretch>
             <a:fillRect/>
           </a:stretch>
@@ -2672,7 +2709,7 @@
           <a:bodyPr wrap="square" lIns="0" tIns="0" rIns="0" bIns="0" rtlCol="0" anchor="ctr"/>
           <a:lstStyle/>
           <a:p>
-            <a:pPr marL="0" indent="0">
+            <a:pPr indent="0" marL="0">
               <a:buNone/>
             </a:pPr>
             <a:r>
@@ -2711,7 +2748,7 @@
           <a:bodyPr wrap="square" lIns="0" tIns="0" rIns="0" bIns="0" rtlCol="0" anchor="t"/>
           <a:lstStyle/>
           <a:p>
-            <a:pPr marL="203200" indent="-203200" algn="l">
+            <a:pPr algn="l" marL="203200" indent="-203200">
               <a:spcAft>
                 <a:spcPts val="700"/>
               </a:spcAft>
@@ -2732,7 +2769,7 @@
             <a:endParaRPr lang="en-US" sz="1350" dirty="0"/>
           </a:p>
           <a:p>
-            <a:pPr marL="203200" indent="-203200" algn="l">
+            <a:pPr algn="l" marL="203200" indent="-203200">
               <a:spcAft>
                 <a:spcPts val="700"/>
               </a:spcAft>
@@ -2753,7 +2790,7 @@
             <a:endParaRPr lang="en-US" sz="1350" dirty="0"/>
           </a:p>
           <a:p>
-            <a:pPr marL="203200" indent="-203200" algn="l">
+            <a:pPr algn="l" marL="203200" indent="-203200">
               <a:spcAft>
                 <a:spcPts val="700"/>
               </a:spcAft>
@@ -2774,7 +2811,7 @@
             <a:endParaRPr lang="en-US" sz="1350" dirty="0"/>
           </a:p>
           <a:p>
-            <a:pPr marL="203200" indent="-203200" algn="l">
+            <a:pPr algn="l" marL="203200" indent="-203200">
               <a:spcAft>
                 <a:spcPts val="700"/>
               </a:spcAft>
@@ -2817,7 +2854,7 @@
           <a:bodyPr wrap="square" lIns="0" tIns="0" rIns="0" bIns="0" rtlCol="0" anchor="ctr"/>
           <a:lstStyle/>
           <a:p>
-            <a:pPr marL="0" indent="0" algn="l">
+            <a:pPr algn="l" indent="0" marL="0">
               <a:buNone/>
             </a:pPr>
             <a:r>
@@ -2831,6 +2868,9 @@
               </a:rPr>
               <a:t>EuroTcl 2026</a:t>
             </a:r>
+            <a:pPr algn="l" indent="0" marL="0">
+              <a:buNone/>
+            </a:pPr>
             <a:r>
               <a:rPr lang="en-US" sz="900" dirty="0">
                 <a:solidFill>
@@ -2867,7 +2907,7 @@
           <a:bodyPr wrap="square" lIns="0" tIns="0" rIns="0" bIns="0" rtlCol="0" anchor="ctr"/>
           <a:lstStyle/>
           <a:p>
-            <a:pPr marL="0" indent="0" algn="r">
+            <a:pPr algn="r" indent="0" marL="0">
               <a:buNone/>
             </a:pPr>
             <a:r>
@@ -2901,7 +2941,6 @@
         <a:solidFill>
           <a:srgbClr val="000000"/>
         </a:solidFill>
-        <a:effectLst/>
       </p:bgPr>
     </p:bg>
     <p:spTree>
@@ -2939,7 +2978,7 @@
           <a:bodyPr wrap="square" lIns="0" tIns="0" rIns="0" bIns="0" rtlCol="0" anchor="ctr"/>
           <a:lstStyle/>
           <a:p>
-            <a:pPr marL="0" indent="0" algn="l">
+            <a:pPr algn="l" indent="0" marL="0">
               <a:buNone/>
             </a:pPr>
             <a:r>
@@ -2978,7 +3017,7 @@
           <a:bodyPr wrap="square" lIns="0" tIns="0" rIns="0" bIns="0" rtlCol="0" anchor="t"/>
           <a:lstStyle/>
           <a:p>
-            <a:pPr marL="0" indent="0" algn="l">
+            <a:pPr algn="l" indent="0" marL="0">
               <a:lnSpc>
                 <a:spcPct val="100000"/>
               </a:lnSpc>
@@ -3020,7 +3059,7 @@
           <a:bodyPr wrap="square" lIns="0" tIns="0" rIns="0" bIns="0" rtlCol="0" anchor="t"/>
           <a:lstStyle/>
           <a:p>
-            <a:pPr marL="0" indent="0" algn="l">
+            <a:pPr algn="l" indent="0" marL="0">
               <a:lnSpc>
                 <a:spcPct val="105000"/>
               </a:lnSpc>
@@ -3067,31 +3106,24 @@
             <a:prstDash val="solid"/>
           </a:ln>
           <a:effectLst>
-            <a:outerShdw blurRad="139700" dist="38100" dir="5400000" algn="bl" rotWithShape="0">
+            <a:outerShdw sx="100000" sy="100000" kx="0" ky="0" algn="bl" rotWithShape="0" blurRad="139700" dist="38100" dir="5400000">
               <a:srgbClr val="000000">
                 <a:alpha val="32000"/>
               </a:srgbClr>
             </a:outerShdw>
           </a:effectLst>
         </p:spPr>
-        <p:txBody>
-          <a:bodyPr/>
-          <a:lstStyle/>
-          <a:p>
-            <a:endParaRPr lang="en-US"/>
-          </a:p>
-        </p:txBody>
       </p:sp>
       <p:pic>
         <p:nvPicPr>
-          <p:cNvPr id="6" name="Image 0" descr="iWish Bluetooth LE debugger scanning and subscribing to a Skale scale on macOS"/>
+          <p:cNvPr id="6" name="Image 0" descr="iWish Bluetooth LE debugger scanning and subscribing to a Skale scale on macOS">    </p:cNvPr>
           <p:cNvPicPr>
             <a:picLocks noChangeAspect="1"/>
           </p:cNvPicPr>
           <p:nvPr/>
         </p:nvPicPr>
         <p:blipFill>
-          <a:blip r:embed="rId3"/>
+          <a:blip r:embed="rId1"/>
           <a:stretch>
             <a:fillRect/>
           </a:stretch>
@@ -3122,7 +3154,6 @@
         <a:solidFill>
           <a:srgbClr val="000000"/>
         </a:solidFill>
-        <a:effectLst/>
       </p:bgPr>
     </p:bg>
     <p:spTree>
@@ -3160,11 +3191,11 @@
           <a:bodyPr wrap="square" lIns="0" tIns="0" rIns="0" bIns="0" rtlCol="0" anchor="ctr"/>
           <a:lstStyle/>
           <a:p>
-            <a:pPr marL="0" indent="0" algn="l">
+            <a:pPr algn="l" indent="0" marL="0">
               <a:buNone/>
             </a:pPr>
             <a:r>
-              <a:rPr lang="en-US" sz="1200" b="1" kern="0" spc="250" dirty="0">
+              <a:rPr lang="en-US" sz="1200" b="1" spc="250" kern="0" dirty="0">
                 <a:solidFill>
                   <a:srgbClr val="E8552D"/>
                 </a:solidFill>
@@ -3199,7 +3230,7 @@
           <a:bodyPr wrap="square" lIns="0" tIns="0" rIns="0" bIns="0" rtlCol="0" anchor="t"/>
           <a:lstStyle/>
           <a:p>
-            <a:pPr marL="0" indent="0" algn="l">
+            <a:pPr algn="l" indent="0" marL="0">
               <a:lnSpc>
                 <a:spcPct val="98000"/>
               </a:lnSpc>
@@ -3241,7 +3272,7 @@
           <a:bodyPr wrap="square" lIns="0" tIns="0" rIns="0" bIns="0" rtlCol="0" anchor="t"/>
           <a:lstStyle/>
           <a:p>
-            <a:pPr marL="203200" indent="-203200" algn="l">
+            <a:pPr algn="l" marL="203200" indent="-203200">
               <a:spcAft>
                 <a:spcPts val="800"/>
               </a:spcAft>
@@ -3262,7 +3293,7 @@
             <a:endParaRPr lang="en-US" sz="1500" dirty="0"/>
           </a:p>
           <a:p>
-            <a:pPr marL="203200" indent="-203200" algn="l">
+            <a:pPr algn="l" marL="203200" indent="-203200">
               <a:spcAft>
                 <a:spcPts val="800"/>
               </a:spcAft>
@@ -3283,7 +3314,7 @@
             <a:endParaRPr lang="en-US" sz="1500" dirty="0"/>
           </a:p>
           <a:p>
-            <a:pPr marL="203200" indent="-203200" algn="l">
+            <a:pPr algn="l" marL="203200" indent="-203200">
               <a:spcAft>
                 <a:spcPts val="800"/>
               </a:spcAft>
@@ -3304,7 +3335,7 @@
             <a:endParaRPr lang="en-US" sz="1500" dirty="0"/>
           </a:p>
           <a:p>
-            <a:pPr marL="203200" indent="-203200" algn="l">
+            <a:pPr algn="l" marL="203200" indent="-203200">
               <a:spcAft>
                 <a:spcPts val="800"/>
               </a:spcAft>
@@ -3325,7 +3356,7 @@
             <a:endParaRPr lang="en-US" sz="1500" dirty="0"/>
           </a:p>
           <a:p>
-            <a:pPr marL="203200" indent="-203200" algn="l">
+            <a:pPr algn="l" marL="203200" indent="-203200">
               <a:spcAft>
                 <a:spcPts val="800"/>
               </a:spcAft>
@@ -3373,20 +3404,13 @@
             <a:prstDash val="solid"/>
           </a:ln>
           <a:effectLst>
-            <a:outerShdw blurRad="101600" dist="38100" dir="5400000" algn="bl" rotWithShape="0">
+            <a:outerShdw sx="100000" sy="100000" kx="0" ky="0" algn="bl" rotWithShape="0" blurRad="101600" dist="38100" dir="5400000">
               <a:srgbClr val="000000">
                 <a:alpha val="10000"/>
               </a:srgbClr>
             </a:outerShdw>
           </a:effectLst>
         </p:spPr>
-        <p:txBody>
-          <a:bodyPr/>
-          <a:lstStyle/>
-          <a:p>
-            <a:endParaRPr lang="en-US"/>
-          </a:p>
-        </p:txBody>
       </p:sp>
       <p:sp>
         <p:nvSpPr>
@@ -3407,31 +3431,24 @@
           </a:solidFill>
           <a:ln/>
           <a:effectLst>
-            <a:outerShdw blurRad="76200" dist="25400" dir="5400000" algn="bl" rotWithShape="0">
+            <a:outerShdw sx="100000" sy="100000" kx="0" ky="0" algn="bl" rotWithShape="0" blurRad="76200" dist="25400" dir="5400000">
               <a:srgbClr val="000000">
                 <a:alpha val="18000"/>
               </a:srgbClr>
             </a:outerShdw>
           </a:effectLst>
         </p:spPr>
-        <p:txBody>
-          <a:bodyPr/>
-          <a:lstStyle/>
-          <a:p>
-            <a:endParaRPr lang="en-US"/>
-          </a:p>
-        </p:txBody>
       </p:sp>
       <p:pic>
         <p:nvPicPr>
-          <p:cNvPr id="7" name="Image 0" descr="preencoded.png"/>
+          <p:cNvPr id="7" name="Image 0" descr="preencoded.png">    </p:cNvPr>
           <p:cNvPicPr>
             <a:picLocks noChangeAspect="1"/>
           </p:cNvPicPr>
           <p:nvPr/>
         </p:nvPicPr>
         <p:blipFill>
-          <a:blip r:embed="rId3"/>
+          <a:blip r:embed="rId1"/>
           <a:stretch>
             <a:fillRect/>
           </a:stretch>
@@ -3467,7 +3484,7 @@
           <a:bodyPr wrap="square" lIns="0" tIns="0" rIns="0" bIns="0" rtlCol="0" anchor="ctr"/>
           <a:lstStyle/>
           <a:p>
-            <a:pPr marL="0" indent="0">
+            <a:pPr indent="0" marL="0">
               <a:buNone/>
             </a:pPr>
             <a:r>
@@ -3506,7 +3523,7 @@
           <a:bodyPr wrap="square" lIns="0" tIns="0" rIns="0" bIns="0" rtlCol="0" anchor="t"/>
           <a:lstStyle/>
           <a:p>
-            <a:pPr marL="0" indent="0">
+            <a:pPr indent="0" marL="0">
               <a:lnSpc>
                 <a:spcPct val="105000"/>
               </a:lnSpc>
@@ -3548,7 +3565,7 @@
           <a:bodyPr wrap="square" lIns="0" tIns="0" rIns="0" bIns="0" rtlCol="0" anchor="ctr"/>
           <a:lstStyle/>
           <a:p>
-            <a:pPr marL="0" indent="0" algn="l">
+            <a:pPr algn="l" indent="0" marL="0">
               <a:buNone/>
             </a:pPr>
             <a:r>
@@ -3562,6 +3579,9 @@
               </a:rPr>
               <a:t>EuroTcl 2026</a:t>
             </a:r>
+            <a:pPr algn="l" indent="0" marL="0">
+              <a:buNone/>
+            </a:pPr>
             <a:r>
               <a:rPr lang="en-US" sz="900" dirty="0">
                 <a:solidFill>
@@ -3598,7 +3618,7 @@
           <a:bodyPr wrap="square" lIns="0" tIns="0" rIns="0" bIns="0" rtlCol="0" anchor="ctr"/>
           <a:lstStyle/>
           <a:p>
-            <a:pPr marL="0" indent="0" algn="r">
+            <a:pPr algn="r" indent="0" marL="0">
               <a:buNone/>
             </a:pPr>
             <a:r>
@@ -3632,7 +3652,6 @@
         <a:solidFill>
           <a:srgbClr val="000000"/>
         </a:solidFill>
-        <a:effectLst/>
       </p:bgPr>
     </p:bg>
     <p:spTree>
@@ -3673,13 +3692,6 @@
             <a:prstDash val="solid"/>
           </a:ln>
         </p:spPr>
-        <p:txBody>
-          <a:bodyPr/>
-          <a:lstStyle/>
-          <a:p>
-            <a:endParaRPr lang="en-US"/>
-          </a:p>
-        </p:txBody>
       </p:sp>
       <p:sp>
         <p:nvSpPr>
@@ -3705,13 +3717,6 @@
             <a:prstDash val="solid"/>
           </a:ln>
         </p:spPr>
-        <p:txBody>
-          <a:bodyPr/>
-          <a:lstStyle/>
-          <a:p>
-            <a:endParaRPr lang="en-US"/>
-          </a:p>
-        </p:txBody>
       </p:sp>
       <p:sp>
         <p:nvSpPr>
@@ -3737,13 +3742,6 @@
             <a:prstDash val="solid"/>
           </a:ln>
         </p:spPr>
-        <p:txBody>
-          <a:bodyPr/>
-          <a:lstStyle/>
-          <a:p>
-            <a:endParaRPr lang="en-US"/>
-          </a:p>
-        </p:txBody>
       </p:sp>
       <p:sp>
         <p:nvSpPr>
@@ -3769,13 +3767,6 @@
             <a:prstDash val="solid"/>
           </a:ln>
         </p:spPr>
-        <p:txBody>
-          <a:bodyPr/>
-          <a:lstStyle/>
-          <a:p>
-            <a:endParaRPr lang="en-US"/>
-          </a:p>
-        </p:txBody>
       </p:sp>
       <p:sp>
         <p:nvSpPr>
@@ -3798,7 +3789,7 @@
           <a:bodyPr wrap="square" lIns="0" tIns="0" rIns="0" bIns="0" rtlCol="0" anchor="t"/>
           <a:lstStyle/>
           <a:p>
-            <a:pPr marL="0" indent="0" algn="l">
+            <a:pPr algn="l" indent="0" marL="0">
               <a:lnSpc>
                 <a:spcPct val="98000"/>
               </a:lnSpc>
@@ -3840,7 +3831,7 @@
           <a:bodyPr wrap="square" lIns="0" tIns="0" rIns="0" bIns="0" rtlCol="0" anchor="t"/>
           <a:lstStyle/>
           <a:p>
-            <a:pPr marL="203200" indent="-203200" algn="l">
+            <a:pPr algn="l" marL="203200" indent="-203200">
               <a:spcAft>
                 <a:spcPts val="800"/>
               </a:spcAft>
@@ -3861,7 +3852,7 @@
             <a:endParaRPr lang="en-US" sz="1500" dirty="0"/>
           </a:p>
           <a:p>
-            <a:pPr marL="203200" indent="-203200" algn="l">
+            <a:pPr algn="l" marL="203200" indent="-203200">
               <a:spcAft>
                 <a:spcPts val="800"/>
               </a:spcAft>
@@ -3882,7 +3873,7 @@
             <a:endParaRPr lang="en-US" sz="1500" dirty="0"/>
           </a:p>
           <a:p>
-            <a:pPr marL="203200" indent="-203200" algn="l">
+            <a:pPr algn="l" marL="203200" indent="-203200">
               <a:spcAft>
                 <a:spcPts val="800"/>
               </a:spcAft>
@@ -3926,13 +3917,6 @@
             <a:prstDash val="solid"/>
           </a:ln>
         </p:spPr>
-        <p:txBody>
-          <a:bodyPr/>
-          <a:lstStyle/>
-          <a:p>
-            <a:endParaRPr lang="en-US"/>
-          </a:p>
-        </p:txBody>
       </p:sp>
       <p:sp>
         <p:nvSpPr>
@@ -3955,7 +3939,7 @@
           <a:bodyPr wrap="square" lIns="0" tIns="0" rIns="0" bIns="0" rtlCol="0" anchor="ctr"/>
           <a:lstStyle/>
           <a:p>
-            <a:pPr marL="0" indent="0" algn="l">
+            <a:pPr algn="l" indent="0" marL="0">
               <a:buNone/>
             </a:pPr>
             <a:r>
@@ -3969,6 +3953,9 @@
               </a:rPr>
               <a:t>John Buckman</a:t>
             </a:r>
+            <a:pPr algn="l" indent="0" marL="0">
+              <a:buNone/>
+            </a:pPr>
             <a:r>
               <a:rPr lang="en-US" sz="1300" dirty="0">
                 <a:solidFill>
@@ -4000,7 +3987,6 @@
         <a:solidFill>
           <a:srgbClr val="000000"/>
         </a:solidFill>
-        <a:effectLst/>
       </p:bgPr>
     </p:bg>
     <p:spTree>
@@ -4038,11 +4024,11 @@
           <a:bodyPr wrap="square" lIns="0" tIns="0" rIns="0" bIns="0" rtlCol="0" anchor="ctr"/>
           <a:lstStyle/>
           <a:p>
-            <a:pPr marL="0" indent="0" algn="l">
+            <a:pPr algn="l" indent="0" marL="0">
               <a:buNone/>
             </a:pPr>
             <a:r>
-              <a:rPr lang="en-US" sz="1200" b="1" kern="0" spc="250" dirty="0">
+              <a:rPr lang="en-US" sz="1200" b="1" spc="250" kern="0" dirty="0">
                 <a:solidFill>
                   <a:srgbClr val="E8552D"/>
                 </a:solidFill>
@@ -4077,7 +4063,7 @@
           <a:bodyPr wrap="square" lIns="0" tIns="0" rIns="0" bIns="0" rtlCol="0" anchor="t"/>
           <a:lstStyle/>
           <a:p>
-            <a:pPr marL="0" indent="0" algn="l">
+            <a:pPr algn="l" indent="0" marL="0">
               <a:lnSpc>
                 <a:spcPct val="98000"/>
               </a:lnSpc>
@@ -4120,13 +4106,6 @@
             <a:prstDash val="solid"/>
           </a:ln>
         </p:spPr>
-        <p:txBody>
-          <a:bodyPr/>
-          <a:lstStyle/>
-          <a:p>
-            <a:endParaRPr lang="en-US"/>
-          </a:p>
-        </p:txBody>
       </p:sp>
       <p:sp>
         <p:nvSpPr>
@@ -4147,13 +4126,6 @@
           </a:solidFill>
           <a:ln/>
         </p:spPr>
-        <p:txBody>
-          <a:bodyPr/>
-          <a:lstStyle/>
-          <a:p>
-            <a:endParaRPr lang="en-US"/>
-          </a:p>
-        </p:txBody>
       </p:sp>
       <p:sp>
         <p:nvSpPr>
@@ -4176,7 +4148,7 @@
           <a:bodyPr wrap="square" lIns="0" tIns="0" rIns="0" bIns="0" rtlCol="0" anchor="ctr"/>
           <a:lstStyle/>
           <a:p>
-            <a:pPr marL="0" indent="0">
+            <a:pPr indent="0" marL="0">
               <a:buNone/>
             </a:pPr>
             <a:r>
@@ -4215,7 +4187,7 @@
           <a:bodyPr wrap="square" lIns="0" tIns="0" rIns="0" bIns="0" rtlCol="0" anchor="ctr"/>
           <a:lstStyle/>
           <a:p>
-            <a:pPr marL="0" indent="0">
+            <a:pPr indent="0" marL="0">
               <a:lnSpc>
                 <a:spcPct val="98000"/>
               </a:lnSpc>
@@ -4255,13 +4227,6 @@
           </a:solidFill>
           <a:ln/>
         </p:spPr>
-        <p:txBody>
-          <a:bodyPr/>
-          <a:lstStyle/>
-          <a:p>
-            <a:endParaRPr lang="en-US"/>
-          </a:p>
-        </p:txBody>
       </p:sp>
       <p:sp>
         <p:nvSpPr>
@@ -4284,7 +4249,7 @@
           <a:bodyPr wrap="square" lIns="0" tIns="0" rIns="0" bIns="0" rtlCol="0" anchor="ctr"/>
           <a:lstStyle/>
           <a:p>
-            <a:pPr marL="0" indent="0">
+            <a:pPr indent="0" marL="0">
               <a:buNone/>
             </a:pPr>
             <a:r>
@@ -4323,7 +4288,7 @@
           <a:bodyPr wrap="square" lIns="0" tIns="0" rIns="0" bIns="0" rtlCol="0" anchor="ctr"/>
           <a:lstStyle/>
           <a:p>
-            <a:pPr marL="0" indent="0">
+            <a:pPr indent="0" marL="0">
               <a:lnSpc>
                 <a:spcPct val="98000"/>
               </a:lnSpc>
@@ -4363,13 +4328,6 @@
           </a:solidFill>
           <a:ln/>
         </p:spPr>
-        <p:txBody>
-          <a:bodyPr/>
-          <a:lstStyle/>
-          <a:p>
-            <a:endParaRPr lang="en-US"/>
-          </a:p>
-        </p:txBody>
       </p:sp>
       <p:sp>
         <p:nvSpPr>
@@ -4392,7 +4350,7 @@
           <a:bodyPr wrap="square" lIns="0" tIns="0" rIns="0" bIns="0" rtlCol="0" anchor="ctr"/>
           <a:lstStyle/>
           <a:p>
-            <a:pPr marL="0" indent="0">
+            <a:pPr indent="0" marL="0">
               <a:buNone/>
             </a:pPr>
             <a:r>
@@ -4431,7 +4389,7 @@
           <a:bodyPr wrap="square" lIns="0" tIns="0" rIns="0" bIns="0" rtlCol="0" anchor="ctr"/>
           <a:lstStyle/>
           <a:p>
-            <a:pPr marL="0" indent="0">
+            <a:pPr indent="0" marL="0">
               <a:lnSpc>
                 <a:spcPct val="98000"/>
               </a:lnSpc>
@@ -4471,13 +4429,6 @@
           </a:solidFill>
           <a:ln/>
         </p:spPr>
-        <p:txBody>
-          <a:bodyPr/>
-          <a:lstStyle/>
-          <a:p>
-            <a:endParaRPr lang="en-US"/>
-          </a:p>
-        </p:txBody>
       </p:sp>
       <p:sp>
         <p:nvSpPr>
@@ -4500,7 +4451,7 @@
           <a:bodyPr wrap="square" lIns="0" tIns="0" rIns="0" bIns="0" rtlCol="0" anchor="ctr"/>
           <a:lstStyle/>
           <a:p>
-            <a:pPr marL="0" indent="0">
+            <a:pPr indent="0" marL="0">
               <a:buNone/>
             </a:pPr>
             <a:r>
@@ -4539,7 +4490,7 @@
           <a:bodyPr wrap="square" lIns="0" tIns="0" rIns="0" bIns="0" rtlCol="0" anchor="ctr"/>
           <a:lstStyle/>
           <a:p>
-            <a:pPr marL="0" indent="0">
+            <a:pPr indent="0" marL="0">
               <a:lnSpc>
                 <a:spcPct val="98000"/>
               </a:lnSpc>
@@ -4579,13 +4530,6 @@
           </a:solidFill>
           <a:ln/>
         </p:spPr>
-        <p:txBody>
-          <a:bodyPr/>
-          <a:lstStyle/>
-          <a:p>
-            <a:endParaRPr lang="en-US"/>
-          </a:p>
-        </p:txBody>
       </p:sp>
       <p:sp>
         <p:nvSpPr>
@@ -4608,7 +4552,7 @@
           <a:bodyPr wrap="square" lIns="0" tIns="0" rIns="0" bIns="0" rtlCol="0" anchor="ctr"/>
           <a:lstStyle/>
           <a:p>
-            <a:pPr marL="0" indent="0">
+            <a:pPr indent="0" marL="0">
               <a:buNone/>
             </a:pPr>
             <a:r>
@@ -4647,7 +4591,7 @@
           <a:bodyPr wrap="square" lIns="0" tIns="0" rIns="0" bIns="0" rtlCol="0" anchor="ctr"/>
           <a:lstStyle/>
           <a:p>
-            <a:pPr marL="0" indent="0">
+            <a:pPr indent="0" marL="0">
               <a:lnSpc>
                 <a:spcPct val="98000"/>
               </a:lnSpc>
@@ -4687,13 +4631,6 @@
           </a:solidFill>
           <a:ln/>
         </p:spPr>
-        <p:txBody>
-          <a:bodyPr/>
-          <a:lstStyle/>
-          <a:p>
-            <a:endParaRPr lang="en-US"/>
-          </a:p>
-        </p:txBody>
       </p:sp>
       <p:sp>
         <p:nvSpPr>
@@ -4716,7 +4653,7 @@
           <a:bodyPr wrap="square" lIns="0" tIns="0" rIns="0" bIns="0" rtlCol="0" anchor="ctr"/>
           <a:lstStyle/>
           <a:p>
-            <a:pPr marL="0" indent="0">
+            <a:pPr indent="0" marL="0">
               <a:buNone/>
             </a:pPr>
             <a:r>
@@ -4755,7 +4692,7 @@
           <a:bodyPr wrap="square" lIns="0" tIns="0" rIns="0" bIns="0" rtlCol="0" anchor="ctr"/>
           <a:lstStyle/>
           <a:p>
-            <a:pPr marL="0" indent="0">
+            <a:pPr indent="0" marL="0">
               <a:lnSpc>
                 <a:spcPct val="98000"/>
               </a:lnSpc>
@@ -4802,20 +4739,13 @@
             <a:prstDash val="solid"/>
           </a:ln>
           <a:effectLst>
-            <a:outerShdw blurRad="101600" dist="38100" dir="5400000" algn="bl" rotWithShape="0">
+            <a:outerShdw sx="100000" sy="100000" kx="0" ky="0" algn="bl" rotWithShape="0" blurRad="101600" dist="38100" dir="5400000">
               <a:srgbClr val="000000">
                 <a:alpha val="10000"/>
               </a:srgbClr>
             </a:outerShdw>
           </a:effectLst>
         </p:spPr>
-        <p:txBody>
-          <a:bodyPr/>
-          <a:lstStyle/>
-          <a:p>
-            <a:endParaRPr lang="en-US"/>
-          </a:p>
-        </p:txBody>
       </p:sp>
       <p:sp>
         <p:nvSpPr>
@@ -4836,31 +4766,24 @@
           </a:solidFill>
           <a:ln/>
           <a:effectLst>
-            <a:outerShdw blurRad="76200" dist="25400" dir="5400000" algn="bl" rotWithShape="0">
+            <a:outerShdw sx="100000" sy="100000" kx="0" ky="0" algn="bl" rotWithShape="0" blurRad="76200" dist="25400" dir="5400000">
               <a:srgbClr val="000000">
                 <a:alpha val="18000"/>
               </a:srgbClr>
             </a:outerShdw>
           </a:effectLst>
         </p:spPr>
-        <p:txBody>
-          <a:bodyPr/>
-          <a:lstStyle/>
-          <a:p>
-            <a:endParaRPr lang="en-US"/>
-          </a:p>
-        </p:txBody>
       </p:sp>
       <p:pic>
         <p:nvPicPr>
-          <p:cNvPr id="25" name="Image 0" descr="preencoded.png"/>
+          <p:cNvPr id="25" name="Image 0" descr="preencoded.png">    </p:cNvPr>
           <p:cNvPicPr>
             <a:picLocks noChangeAspect="1"/>
           </p:cNvPicPr>
           <p:nvPr/>
         </p:nvPicPr>
         <p:blipFill>
-          <a:blip r:embed="rId3"/>
+          <a:blip r:embed="rId1"/>
           <a:stretch>
             <a:fillRect/>
           </a:stretch>
@@ -4896,7 +4819,7 @@
           <a:bodyPr wrap="square" lIns="0" tIns="0" rIns="0" bIns="0" rtlCol="0" anchor="t"/>
           <a:lstStyle/>
           <a:p>
-            <a:pPr marL="0" indent="0">
+            <a:pPr indent="0" marL="0">
               <a:lnSpc>
                 <a:spcPct val="98000"/>
               </a:lnSpc>
@@ -4938,7 +4861,7 @@
           <a:bodyPr wrap="square" lIns="0" tIns="0" rIns="0" bIns="0" rtlCol="0" anchor="t"/>
           <a:lstStyle/>
           <a:p>
-            <a:pPr marL="0" indent="0">
+            <a:pPr indent="0" marL="0">
               <a:lnSpc>
                 <a:spcPct val="105000"/>
               </a:lnSpc>
@@ -4980,7 +4903,7 @@
           <a:bodyPr wrap="square" lIns="0" tIns="0" rIns="0" bIns="0" rtlCol="0" anchor="ctr"/>
           <a:lstStyle/>
           <a:p>
-            <a:pPr marL="0" indent="0" algn="l">
+            <a:pPr algn="l" indent="0" marL="0">
               <a:buNone/>
             </a:pPr>
             <a:r>
@@ -4994,6 +4917,9 @@
               </a:rPr>
               <a:t>EuroTcl 2026</a:t>
             </a:r>
+            <a:pPr algn="l" indent="0" marL="0">
+              <a:buNone/>
+            </a:pPr>
             <a:r>
               <a:rPr lang="en-US" sz="900" dirty="0">
                 <a:solidFill>
@@ -5030,7 +4956,7 @@
           <a:bodyPr wrap="square" lIns="0" tIns="0" rIns="0" bIns="0" rtlCol="0" anchor="ctr"/>
           <a:lstStyle/>
           <a:p>
-            <a:pPr marL="0" indent="0" algn="r">
+            <a:pPr algn="r" indent="0" marL="0">
               <a:buNone/>
             </a:pPr>
             <a:r>
@@ -5064,7 +4990,6 @@
         <a:solidFill>
           <a:srgbClr val="000000"/>
         </a:solidFill>
-        <a:effectLst/>
       </p:bgPr>
     </p:bg>
     <p:spTree>
@@ -5102,11 +5027,11 @@
           <a:bodyPr wrap="square" lIns="0" tIns="0" rIns="0" bIns="0" rtlCol="0" anchor="ctr"/>
           <a:lstStyle/>
           <a:p>
-            <a:pPr marL="0" indent="0" algn="l">
+            <a:pPr algn="l" indent="0" marL="0">
               <a:buNone/>
             </a:pPr>
             <a:r>
-              <a:rPr lang="en-US" sz="1200" b="1" kern="0" spc="250" dirty="0">
+              <a:rPr lang="en-US" sz="1200" b="1" spc="250" kern="0" dirty="0">
                 <a:solidFill>
                   <a:srgbClr val="E8552D"/>
                 </a:solidFill>
@@ -5141,7 +5066,7 @@
           <a:bodyPr wrap="square" lIns="0" tIns="0" rIns="0" bIns="0" rtlCol="0" anchor="t"/>
           <a:lstStyle/>
           <a:p>
-            <a:pPr marL="0" indent="0" algn="l">
+            <a:pPr algn="l" indent="0" marL="0">
               <a:lnSpc>
                 <a:spcPct val="98000"/>
               </a:lnSpc>
@@ -5188,20 +5113,13 @@
             <a:prstDash val="solid"/>
           </a:ln>
           <a:effectLst>
-            <a:outerShdw blurRad="101600" dist="38100" dir="5400000" algn="bl" rotWithShape="0">
+            <a:outerShdw sx="100000" sy="100000" kx="0" ky="0" algn="bl" rotWithShape="0" blurRad="101600" dist="38100" dir="5400000">
               <a:srgbClr val="000000">
                 <a:alpha val="10000"/>
               </a:srgbClr>
             </a:outerShdw>
           </a:effectLst>
         </p:spPr>
-        <p:txBody>
-          <a:bodyPr/>
-          <a:lstStyle/>
-          <a:p>
-            <a:endParaRPr lang="en-US"/>
-          </a:p>
-        </p:txBody>
       </p:sp>
       <p:sp>
         <p:nvSpPr>
@@ -5224,7 +5142,7 @@
           <a:bodyPr wrap="square" lIns="0" tIns="0" rIns="0" bIns="0" rtlCol="0" anchor="ctr"/>
           <a:lstStyle/>
           <a:p>
-            <a:pPr marL="0" indent="0" algn="ctr">
+            <a:pPr algn="ctr" indent="0" marL="0">
               <a:buNone/>
             </a:pPr>
             <a:r>
@@ -5263,7 +5181,7 @@
           <a:bodyPr wrap="square" lIns="0" tIns="0" rIns="0" bIns="0" rtlCol="0" anchor="ctr"/>
           <a:lstStyle/>
           <a:p>
-            <a:pPr marL="0" indent="0" algn="ctr">
+            <a:pPr algn="ctr" indent="0" marL="0">
               <a:buNone/>
             </a:pPr>
             <a:r>
@@ -5302,7 +5220,7 @@
           <a:bodyPr wrap="square" lIns="0" tIns="0" rIns="0" bIns="0" rtlCol="0" anchor="t"/>
           <a:lstStyle/>
           <a:p>
-            <a:pPr marL="0" indent="0" algn="ctr">
+            <a:pPr algn="ctr" indent="0" marL="0">
               <a:lnSpc>
                 <a:spcPct val="112000"/>
               </a:lnSpc>
@@ -5322,7 +5240,7 @@
             <a:endParaRPr lang="en-US" sz="1150" dirty="0"/>
           </a:p>
           <a:p>
-            <a:pPr marL="0" indent="0" algn="ctr">
+            <a:pPr algn="ctr" indent="0" marL="0">
               <a:lnSpc>
                 <a:spcPct val="112000"/>
               </a:lnSpc>
@@ -5364,7 +5282,7 @@
           <a:bodyPr wrap="square" lIns="0" tIns="0" rIns="0" bIns="0" rtlCol="0" anchor="ctr"/>
           <a:lstStyle/>
           <a:p>
-            <a:pPr marL="0" indent="0">
+            <a:pPr indent="0" marL="0">
               <a:buNone/>
             </a:pPr>
             <a:r>
@@ -5403,7 +5321,7 @@
           <a:bodyPr wrap="square" lIns="0" tIns="0" rIns="0" bIns="0" rtlCol="0" anchor="ctr"/>
           <a:lstStyle/>
           <a:p>
-            <a:pPr marL="0" indent="0">
+            <a:pPr indent="0" marL="0">
               <a:buNone/>
             </a:pPr>
             <a:r>
@@ -5417,6 +5335,9 @@
               </a:rPr>
               <a:t>1.25×</a:t>
             </a:r>
+            <a:pPr indent="0" marL="0">
+              <a:buNone/>
+            </a:pPr>
             <a:r>
               <a:rPr lang="en-US" sz="1050" dirty="0">
                 <a:solidFill>
@@ -5453,13 +5374,6 @@
           </a:solidFill>
           <a:ln/>
         </p:spPr>
-        <p:txBody>
-          <a:bodyPr/>
-          <a:lstStyle/>
-          <a:p>
-            <a:endParaRPr lang="en-US"/>
-          </a:p>
-        </p:txBody>
       </p:sp>
       <p:sp>
         <p:nvSpPr>
@@ -5482,13 +5396,6 @@
           </a:solidFill>
           <a:ln/>
         </p:spPr>
-        <p:txBody>
-          <a:bodyPr/>
-          <a:lstStyle/>
-          <a:p>
-            <a:endParaRPr lang="en-US"/>
-          </a:p>
-        </p:txBody>
       </p:sp>
       <p:sp>
         <p:nvSpPr>
@@ -5511,7 +5418,7 @@
           <a:bodyPr wrap="square" lIns="0" tIns="0" rIns="0" bIns="0" rtlCol="0" anchor="ctr"/>
           <a:lstStyle/>
           <a:p>
-            <a:pPr marL="0" indent="0">
+            <a:pPr indent="0" marL="0">
               <a:buNone/>
             </a:pPr>
             <a:r>
@@ -5550,7 +5457,7 @@
           <a:bodyPr wrap="square" lIns="0" tIns="0" rIns="0" bIns="0" rtlCol="0" anchor="ctr"/>
           <a:lstStyle/>
           <a:p>
-            <a:pPr marL="0" indent="0">
+            <a:pPr indent="0" marL="0">
               <a:buNone/>
             </a:pPr>
             <a:r>
@@ -5564,6 +5471,9 @@
               </a:rPr>
               <a:t>1.47×</a:t>
             </a:r>
+            <a:pPr indent="0" marL="0">
+              <a:buNone/>
+            </a:pPr>
             <a:r>
               <a:rPr lang="en-US" sz="1050" dirty="0">
                 <a:solidFill>
@@ -5600,13 +5510,6 @@
           </a:solidFill>
           <a:ln/>
         </p:spPr>
-        <p:txBody>
-          <a:bodyPr/>
-          <a:lstStyle/>
-          <a:p>
-            <a:endParaRPr lang="en-US"/>
-          </a:p>
-        </p:txBody>
       </p:sp>
       <p:sp>
         <p:nvSpPr>
@@ -5629,13 +5532,6 @@
           </a:solidFill>
           <a:ln/>
         </p:spPr>
-        <p:txBody>
-          <a:bodyPr/>
-          <a:lstStyle/>
-          <a:p>
-            <a:endParaRPr lang="en-US"/>
-          </a:p>
-        </p:txBody>
       </p:sp>
       <p:sp>
         <p:nvSpPr>
@@ -5658,7 +5554,7 @@
           <a:bodyPr wrap="square" lIns="0" tIns="0" rIns="0" bIns="0" rtlCol="0" anchor="ctr"/>
           <a:lstStyle/>
           <a:p>
-            <a:pPr marL="0" indent="0">
+            <a:pPr indent="0" marL="0">
               <a:buNone/>
             </a:pPr>
             <a:r>
@@ -5697,7 +5593,7 @@
           <a:bodyPr wrap="square" lIns="0" tIns="0" rIns="0" bIns="0" rtlCol="0" anchor="ctr"/>
           <a:lstStyle/>
           <a:p>
-            <a:pPr marL="0" indent="0">
+            <a:pPr indent="0" marL="0">
               <a:buNone/>
             </a:pPr>
             <a:r>
@@ -5711,6 +5607,9 @@
               </a:rPr>
               <a:t>1.53×</a:t>
             </a:r>
+            <a:pPr indent="0" marL="0">
+              <a:buNone/>
+            </a:pPr>
             <a:r>
               <a:rPr lang="en-US" sz="1050" dirty="0">
                 <a:solidFill>
@@ -5747,13 +5646,6 @@
           </a:solidFill>
           <a:ln/>
         </p:spPr>
-        <p:txBody>
-          <a:bodyPr/>
-          <a:lstStyle/>
-          <a:p>
-            <a:endParaRPr lang="en-US"/>
-          </a:p>
-        </p:txBody>
       </p:sp>
       <p:sp>
         <p:nvSpPr>
@@ -5776,13 +5668,6 @@
           </a:solidFill>
           <a:ln/>
         </p:spPr>
-        <p:txBody>
-          <a:bodyPr/>
-          <a:lstStyle/>
-          <a:p>
-            <a:endParaRPr lang="en-US"/>
-          </a:p>
-        </p:txBody>
       </p:sp>
       <p:sp>
         <p:nvSpPr>
@@ -5805,7 +5690,7 @@
           <a:bodyPr wrap="square" lIns="0" tIns="0" rIns="0" bIns="0" rtlCol="0" anchor="ctr"/>
           <a:lstStyle/>
           <a:p>
-            <a:pPr marL="0" indent="0">
+            <a:pPr indent="0" marL="0">
               <a:buNone/>
             </a:pPr>
             <a:r>
@@ -5844,7 +5729,7 @@
           <a:bodyPr wrap="square" lIns="0" tIns="0" rIns="0" bIns="0" rtlCol="0" anchor="ctr"/>
           <a:lstStyle/>
           <a:p>
-            <a:pPr marL="0" indent="0">
+            <a:pPr indent="0" marL="0">
               <a:buNone/>
             </a:pPr>
             <a:r>
@@ -5858,6 +5743,9 @@
               </a:rPr>
               <a:t>1.31×</a:t>
             </a:r>
+            <a:pPr indent="0" marL="0">
+              <a:buNone/>
+            </a:pPr>
             <a:r>
               <a:rPr lang="en-US" sz="1050" dirty="0">
                 <a:solidFill>
@@ -5894,13 +5782,6 @@
           </a:solidFill>
           <a:ln/>
         </p:spPr>
-        <p:txBody>
-          <a:bodyPr/>
-          <a:lstStyle/>
-          <a:p>
-            <a:endParaRPr lang="en-US"/>
-          </a:p>
-        </p:txBody>
       </p:sp>
       <p:sp>
         <p:nvSpPr>
@@ -5923,13 +5804,6 @@
           </a:solidFill>
           <a:ln/>
         </p:spPr>
-        <p:txBody>
-          <a:bodyPr/>
-          <a:lstStyle/>
-          <a:p>
-            <a:endParaRPr lang="en-US"/>
-          </a:p>
-        </p:txBody>
       </p:sp>
       <p:sp>
         <p:nvSpPr>
@@ -5939,8 +5813,8 @@
         </p:nvSpPr>
         <p:spPr>
           <a:xfrm>
-            <a:off x="502920" y="4169664"/>
-            <a:ext cx="8138160" cy="612648"/>
+            <a:off x="502920" y="4050792"/>
+            <a:ext cx="8138160" cy="731520"/>
           </a:xfrm>
           <a:prstGeom prst="rect">
             <a:avLst/>
@@ -5952,14 +5826,14 @@
           <a:bodyPr wrap="square" lIns="0" tIns="0" rIns="0" bIns="0" rtlCol="0" anchor="t"/>
           <a:lstStyle/>
           <a:p>
-            <a:pPr marL="0" indent="0" algn="l">
+            <a:pPr algn="l" indent="0" marL="0">
               <a:lnSpc>
                 <a:spcPct val="108000"/>
               </a:lnSpc>
               <a:buNone/>
             </a:pPr>
             <a:r>
-              <a:rPr lang="en-US" sz="1050" i="1" dirty="0">
+              <a:rPr lang="en-US" sz="1050" b="1" i="1" dirty="0">
                 <a:solidFill>
                   <a:srgbClr val="9AA6B5"/>
                 </a:solidFill>
@@ -5967,7 +5841,24 @@
                 <a:ea typeface="Calibri" pitchFamily="34" charset="-122"/>
                 <a:cs typeface="Calibri" pitchFamily="34" charset="-120"/>
               </a:rPr>
-              <a:t>Tk gains are smallest because much of that work is SDL surface blitting on the GPU — CPU-heavy math and list work shows the biggest native win.</a:t>
+              <a:t>Two caveats: </a:t>
+            </a:r>
+            <a:pPr algn="l" indent="0" marL="0">
+              <a:lnSpc>
+                <a:spcPct val="108000"/>
+              </a:lnSpc>
+              <a:buNone/>
+            </a:pPr>
+            <a:r>
+              <a:rPr lang="en-US" sz="1050" i="1" dirty="0">
+                <a:solidFill>
+                  <a:srgbClr val="9AA6B5"/>
+                </a:solidFill>
+                <a:latin typeface="Calibri" pitchFamily="34" charset="0"/>
+                <a:ea typeface="Calibri" pitchFamily="34" charset="-122"/>
+                <a:cs typeface="Calibri" pitchFamily="34" charset="-120"/>
+              </a:rPr>
+              <a:t>the builds also differ by a Tcl minor bump (8.6.9 → 8.6.10), so this is a real-world build-to-build comparison, not pure arch isolation. Tk gains are smallest because much of that work is SDL surface blitting on the GPU — CPU-heavy math and list work shows the biggest native win.</a:t>
             </a:r>
             <a:endParaRPr lang="en-US" sz="1050" dirty="0"/>
           </a:p>
@@ -5994,7 +5885,7 @@
           <a:bodyPr wrap="square" lIns="0" tIns="0" rIns="0" bIns="0" rtlCol="0" anchor="ctr"/>
           <a:lstStyle/>
           <a:p>
-            <a:pPr marL="0" indent="0" algn="l">
+            <a:pPr algn="l" indent="0" marL="0">
               <a:buNone/>
             </a:pPr>
             <a:r>
@@ -6008,6 +5899,9 @@
               </a:rPr>
               <a:t>EuroTcl 2026</a:t>
             </a:r>
+            <a:pPr algn="l" indent="0" marL="0">
+              <a:buNone/>
+            </a:pPr>
             <a:r>
               <a:rPr lang="en-US" sz="900" dirty="0">
                 <a:solidFill>
@@ -6044,7 +5938,7 @@
           <a:bodyPr wrap="square" lIns="0" tIns="0" rIns="0" bIns="0" rtlCol="0" anchor="ctr"/>
           <a:lstStyle/>
           <a:p>
-            <a:pPr marL="0" indent="0" algn="r">
+            <a:pPr algn="r" indent="0" marL="0">
               <a:buNone/>
             </a:pPr>
             <a:r>
@@ -6078,7 +5972,6 @@
         <a:solidFill>
           <a:srgbClr val="000000"/>
         </a:solidFill>
-        <a:effectLst/>
       </p:bgPr>
     </p:bg>
     <p:spTree>
@@ -6116,11 +6009,11 @@
           <a:bodyPr wrap="square" lIns="0" tIns="0" rIns="0" bIns="0" rtlCol="0" anchor="ctr"/>
           <a:lstStyle/>
           <a:p>
-            <a:pPr marL="0" indent="0" algn="l">
+            <a:pPr algn="l" indent="0" marL="0">
               <a:buNone/>
             </a:pPr>
             <a:r>
-              <a:rPr lang="en-US" sz="1200" b="1" kern="0" spc="250" dirty="0">
+              <a:rPr lang="en-US" sz="1200" b="1" spc="250" kern="0" dirty="0">
                 <a:solidFill>
                   <a:srgbClr val="E8552D"/>
                 </a:solidFill>
@@ -6155,7 +6048,7 @@
           <a:bodyPr wrap="square" lIns="0" tIns="0" rIns="0" bIns="0" rtlCol="0" anchor="t"/>
           <a:lstStyle/>
           <a:p>
-            <a:pPr marL="0" indent="0" algn="l">
+            <a:pPr algn="l" indent="0" marL="0">
               <a:lnSpc>
                 <a:spcPct val="98000"/>
               </a:lnSpc>
@@ -6192,69 +6085,21 @@
         </p:nvGraphicFramePr>
         <p:xfrm>
           <a:off x="502920" y="1554480"/>
-          <a:ext cx="7168896" cy="2715768"/>
+          <a:ext cx="8138160" cy="914400"/>
         </p:xfrm>
         <a:graphic>
           <a:graphicData uri="http://schemas.openxmlformats.org/drawingml/2006/table">
             <a:tbl>
               <a:tblPr/>
               <a:tblGrid>
-                <a:gridCol w="1737360">
-                  <a:extLst>
-                    <a:ext uri="{9D8B030D-6E8A-4147-A177-3AD203B41FA5}">
-                      <a16:colId xmlns:a16="http://schemas.microsoft.com/office/drawing/2014/main" val="20000"/>
-                    </a:ext>
-                  </a:extLst>
-                </a:gridCol>
-                <a:gridCol w="566928">
-                  <a:extLst>
-                    <a:ext uri="{9D8B030D-6E8A-4147-A177-3AD203B41FA5}">
-                      <a16:colId xmlns:a16="http://schemas.microsoft.com/office/drawing/2014/main" val="20001"/>
-                    </a:ext>
-                  </a:extLst>
-                </a:gridCol>
-                <a:gridCol w="621792">
-                  <a:extLst>
-                    <a:ext uri="{9D8B030D-6E8A-4147-A177-3AD203B41FA5}">
-                      <a16:colId xmlns:a16="http://schemas.microsoft.com/office/drawing/2014/main" val="20002"/>
-                    </a:ext>
-                  </a:extLst>
-                </a:gridCol>
-                <a:gridCol w="658368">
-                  <a:extLst>
-                    <a:ext uri="{9D8B030D-6E8A-4147-A177-3AD203B41FA5}">
-                      <a16:colId xmlns:a16="http://schemas.microsoft.com/office/drawing/2014/main" val="20003"/>
-                    </a:ext>
-                  </a:extLst>
-                </a:gridCol>
-                <a:gridCol w="1737360">
-                  <a:extLst>
-                    <a:ext uri="{9D8B030D-6E8A-4147-A177-3AD203B41FA5}">
-                      <a16:colId xmlns:a16="http://schemas.microsoft.com/office/drawing/2014/main" val="20004"/>
-                    </a:ext>
-                  </a:extLst>
-                </a:gridCol>
-                <a:gridCol w="566928">
-                  <a:extLst>
-                    <a:ext uri="{9D8B030D-6E8A-4147-A177-3AD203B41FA5}">
-                      <a16:colId xmlns:a16="http://schemas.microsoft.com/office/drawing/2014/main" val="20005"/>
-                    </a:ext>
-                  </a:extLst>
-                </a:gridCol>
-                <a:gridCol w="621792">
-                  <a:extLst>
-                    <a:ext uri="{9D8B030D-6E8A-4147-A177-3AD203B41FA5}">
-                      <a16:colId xmlns:a16="http://schemas.microsoft.com/office/drawing/2014/main" val="20006"/>
-                    </a:ext>
-                  </a:extLst>
-                </a:gridCol>
-                <a:gridCol w="658368">
-                  <a:extLst>
-                    <a:ext uri="{9D8B030D-6E8A-4147-A177-3AD203B41FA5}">
-                      <a16:colId xmlns:a16="http://schemas.microsoft.com/office/drawing/2014/main" val="20007"/>
-                    </a:ext>
-                  </a:extLst>
-                </a:gridCol>
+                <a:gridCol w="1737360"/>
+                <a:gridCol w="566928"/>
+                <a:gridCol w="621792"/>
+                <a:gridCol w="658368"/>
+                <a:gridCol w="1737360"/>
+                <a:gridCol w="566928"/>
+                <a:gridCol w="621792"/>
+                <a:gridCol w="658368"/>
               </a:tblGrid>
               <a:tr h="246888">
                 <a:tc>
@@ -6262,7 +6107,7 @@
                     <a:bodyPr/>
                     <a:lstStyle/>
                     <a:p>
-                      <a:pPr marL="0" indent="0" algn="l">
+                      <a:pPr algn="l" indent="0" marL="0">
                         <a:buNone/>
                       </a:pPr>
                       <a:r>
@@ -6330,7 +6175,7 @@
                     <a:bodyPr/>
                     <a:lstStyle/>
                     <a:p>
-                      <a:pPr marL="0" indent="0" algn="r">
+                      <a:pPr algn="r" indent="0" marL="0">
                         <a:buNone/>
                       </a:pPr>
                       <a:r>
@@ -6398,7 +6243,7 @@
                     <a:bodyPr/>
                     <a:lstStyle/>
                     <a:p>
-                      <a:pPr marL="0" indent="0" algn="r">
+                      <a:pPr algn="r" indent="0" marL="0">
                         <a:buNone/>
                       </a:pPr>
                       <a:r>
@@ -6466,7 +6311,7 @@
                     <a:bodyPr/>
                     <a:lstStyle/>
                     <a:p>
-                      <a:pPr marL="0" indent="0" algn="r">
+                      <a:pPr algn="r" indent="0" marL="0">
                         <a:buNone/>
                       </a:pPr>
                       <a:r>
@@ -6534,7 +6379,7 @@
                     <a:bodyPr/>
                     <a:lstStyle/>
                     <a:p>
-                      <a:pPr marL="0" indent="0" algn="l">
+                      <a:pPr algn="l" indent="0" marL="0">
                         <a:buNone/>
                       </a:pPr>
                       <a:r>
@@ -6602,7 +6447,7 @@
                     <a:bodyPr/>
                     <a:lstStyle/>
                     <a:p>
-                      <a:pPr marL="0" indent="0" algn="r">
+                      <a:pPr algn="r" indent="0" marL="0">
                         <a:buNone/>
                       </a:pPr>
                       <a:r>
@@ -6670,7 +6515,7 @@
                     <a:bodyPr/>
                     <a:lstStyle/>
                     <a:p>
-                      <a:pPr marL="0" indent="0" algn="r">
+                      <a:pPr algn="r" indent="0" marL="0">
                         <a:buNone/>
                       </a:pPr>
                       <a:r>
@@ -6738,7 +6583,7 @@
                     <a:bodyPr/>
                     <a:lstStyle/>
                     <a:p>
-                      <a:pPr marL="0" indent="0" algn="r">
+                      <a:pPr algn="r" indent="0" marL="0">
                         <a:buNone/>
                       </a:pPr>
                       <a:r>
@@ -6801,11 +6646,6 @@
                     </a:solidFill>
                   </a:tcPr>
                 </a:tc>
-                <a:extLst>
-                  <a:ext uri="{0D108BD9-81ED-4DB2-BD59-A6C34878D82A}">
-                    <a16:rowId xmlns:a16="http://schemas.microsoft.com/office/drawing/2014/main" val="10000"/>
-                  </a:ext>
-                </a:extLst>
               </a:tr>
               <a:tr h="246888">
                 <a:tc>
@@ -6813,7 +6653,7 @@
                     <a:bodyPr/>
                     <a:lstStyle/>
                     <a:p>
-                      <a:pPr marL="0" indent="0" algn="l">
+                      <a:pPr algn="l" indent="0" marL="0">
                         <a:buNone/>
                       </a:pPr>
                       <a:r>
@@ -6881,7 +6721,7 @@
                     <a:bodyPr/>
                     <a:lstStyle/>
                     <a:p>
-                      <a:pPr marL="0" indent="0" algn="r">
+                      <a:pPr algn="r" indent="0" marL="0">
                         <a:buNone/>
                       </a:pPr>
                       <a:r>
@@ -6949,7 +6789,7 @@
                     <a:bodyPr/>
                     <a:lstStyle/>
                     <a:p>
-                      <a:pPr marL="0" indent="0" algn="r">
+                      <a:pPr algn="r" indent="0" marL="0">
                         <a:buNone/>
                       </a:pPr>
                       <a:r>
@@ -7017,7 +6857,7 @@
                     <a:bodyPr/>
                     <a:lstStyle/>
                     <a:p>
-                      <a:pPr marL="0" indent="0" algn="r">
+                      <a:pPr algn="r" indent="0" marL="0">
                         <a:buNone/>
                       </a:pPr>
                       <a:r>
@@ -7085,7 +6925,7 @@
                     <a:bodyPr/>
                     <a:lstStyle/>
                     <a:p>
-                      <a:pPr marL="0" indent="0" algn="l">
+                      <a:pPr algn="l" indent="0" marL="0">
                         <a:buNone/>
                       </a:pPr>
                       <a:r>
@@ -7153,7 +6993,7 @@
                     <a:bodyPr/>
                     <a:lstStyle/>
                     <a:p>
-                      <a:pPr marL="0" indent="0" algn="r">
+                      <a:pPr algn="r" indent="0" marL="0">
                         <a:buNone/>
                       </a:pPr>
                       <a:r>
@@ -7221,7 +7061,7 @@
                     <a:bodyPr/>
                     <a:lstStyle/>
                     <a:p>
-                      <a:pPr marL="0" indent="0" algn="r">
+                      <a:pPr algn="r" indent="0" marL="0">
                         <a:buNone/>
                       </a:pPr>
                       <a:r>
@@ -7289,7 +7129,7 @@
                     <a:bodyPr/>
                     <a:lstStyle/>
                     <a:p>
-                      <a:pPr marL="0" indent="0" algn="r">
+                      <a:pPr algn="r" indent="0" marL="0">
                         <a:buNone/>
                       </a:pPr>
                       <a:r>
@@ -7352,11 +7192,6 @@
                     </a:solidFill>
                   </a:tcPr>
                 </a:tc>
-                <a:extLst>
-                  <a:ext uri="{0D108BD9-81ED-4DB2-BD59-A6C34878D82A}">
-                    <a16:rowId xmlns:a16="http://schemas.microsoft.com/office/drawing/2014/main" val="10001"/>
-                  </a:ext>
-                </a:extLst>
               </a:tr>
               <a:tr h="246888">
                 <a:tc>
@@ -7364,7 +7199,7 @@
                     <a:bodyPr/>
                     <a:lstStyle/>
                     <a:p>
-                      <a:pPr marL="0" indent="0" algn="l">
+                      <a:pPr algn="l" indent="0" marL="0">
                         <a:buNone/>
                       </a:pPr>
                       <a:r>
@@ -7432,7 +7267,7 @@
                     <a:bodyPr/>
                     <a:lstStyle/>
                     <a:p>
-                      <a:pPr marL="0" indent="0" algn="r">
+                      <a:pPr algn="r" indent="0" marL="0">
                         <a:buNone/>
                       </a:pPr>
                       <a:r>
@@ -7500,7 +7335,7 @@
                     <a:bodyPr/>
                     <a:lstStyle/>
                     <a:p>
-                      <a:pPr marL="0" indent="0" algn="r">
+                      <a:pPr algn="r" indent="0" marL="0">
                         <a:buNone/>
                       </a:pPr>
                       <a:r>
@@ -7568,7 +7403,7 @@
                     <a:bodyPr/>
                     <a:lstStyle/>
                     <a:p>
-                      <a:pPr marL="0" indent="0" algn="r">
+                      <a:pPr algn="r" indent="0" marL="0">
                         <a:buNone/>
                       </a:pPr>
                       <a:r>
@@ -7636,7 +7471,7 @@
                     <a:bodyPr/>
                     <a:lstStyle/>
                     <a:p>
-                      <a:pPr marL="0" indent="0" algn="l">
+                      <a:pPr algn="l" indent="0" marL="0">
                         <a:buNone/>
                       </a:pPr>
                       <a:r>
@@ -7704,7 +7539,7 @@
                     <a:bodyPr/>
                     <a:lstStyle/>
                     <a:p>
-                      <a:pPr marL="0" indent="0" algn="r">
+                      <a:pPr algn="r" indent="0" marL="0">
                         <a:buNone/>
                       </a:pPr>
                       <a:r>
@@ -7772,7 +7607,7 @@
                     <a:bodyPr/>
                     <a:lstStyle/>
                     <a:p>
-                      <a:pPr marL="0" indent="0" algn="r">
+                      <a:pPr algn="r" indent="0" marL="0">
                         <a:buNone/>
                       </a:pPr>
                       <a:r>
@@ -7840,7 +7675,7 @@
                     <a:bodyPr/>
                     <a:lstStyle/>
                     <a:p>
-                      <a:pPr marL="0" indent="0" algn="r">
+                      <a:pPr algn="r" indent="0" marL="0">
                         <a:buNone/>
                       </a:pPr>
                       <a:r>
@@ -7903,11 +7738,6 @@
                     </a:solidFill>
                   </a:tcPr>
                 </a:tc>
-                <a:extLst>
-                  <a:ext uri="{0D108BD9-81ED-4DB2-BD59-A6C34878D82A}">
-                    <a16:rowId xmlns:a16="http://schemas.microsoft.com/office/drawing/2014/main" val="10002"/>
-                  </a:ext>
-                </a:extLst>
               </a:tr>
               <a:tr h="246888">
                 <a:tc>
@@ -7915,7 +7745,7 @@
                     <a:bodyPr/>
                     <a:lstStyle/>
                     <a:p>
-                      <a:pPr marL="0" indent="0" algn="l">
+                      <a:pPr algn="l" indent="0" marL="0">
                         <a:buNone/>
                       </a:pPr>
                       <a:r>
@@ -7983,7 +7813,7 @@
                     <a:bodyPr/>
                     <a:lstStyle/>
                     <a:p>
-                      <a:pPr marL="0" indent="0" algn="r">
+                      <a:pPr algn="r" indent="0" marL="0">
                         <a:buNone/>
                       </a:pPr>
                       <a:r>
@@ -8051,7 +7881,7 @@
                     <a:bodyPr/>
                     <a:lstStyle/>
                     <a:p>
-                      <a:pPr marL="0" indent="0" algn="r">
+                      <a:pPr algn="r" indent="0" marL="0">
                         <a:buNone/>
                       </a:pPr>
                       <a:r>
@@ -8119,7 +7949,7 @@
                     <a:bodyPr/>
                     <a:lstStyle/>
                     <a:p>
-                      <a:pPr marL="0" indent="0" algn="r">
+                      <a:pPr algn="r" indent="0" marL="0">
                         <a:buNone/>
                       </a:pPr>
                       <a:r>
@@ -8187,7 +8017,7 @@
                     <a:bodyPr/>
                     <a:lstStyle/>
                     <a:p>
-                      <a:pPr marL="0" indent="0" algn="l">
+                      <a:pPr algn="l" indent="0" marL="0">
                         <a:buNone/>
                       </a:pPr>
                       <a:r>
@@ -8255,7 +8085,7 @@
                     <a:bodyPr/>
                     <a:lstStyle/>
                     <a:p>
-                      <a:pPr marL="0" indent="0" algn="r">
+                      <a:pPr algn="r" indent="0" marL="0">
                         <a:buNone/>
                       </a:pPr>
                       <a:r>
@@ -8323,7 +8153,7 @@
                     <a:bodyPr/>
                     <a:lstStyle/>
                     <a:p>
-                      <a:pPr marL="0" indent="0" algn="r">
+                      <a:pPr algn="r" indent="0" marL="0">
                         <a:buNone/>
                       </a:pPr>
                       <a:r>
@@ -8391,7 +8221,7 @@
                     <a:bodyPr/>
                     <a:lstStyle/>
                     <a:p>
-                      <a:pPr marL="0" indent="0" algn="r">
+                      <a:pPr algn="r" indent="0" marL="0">
                         <a:buNone/>
                       </a:pPr>
                       <a:r>
@@ -8454,11 +8284,6 @@
                     </a:solidFill>
                   </a:tcPr>
                 </a:tc>
-                <a:extLst>
-                  <a:ext uri="{0D108BD9-81ED-4DB2-BD59-A6C34878D82A}">
-                    <a16:rowId xmlns:a16="http://schemas.microsoft.com/office/drawing/2014/main" val="10003"/>
-                  </a:ext>
-                </a:extLst>
               </a:tr>
               <a:tr h="246888">
                 <a:tc>
@@ -8466,7 +8291,7 @@
                     <a:bodyPr/>
                     <a:lstStyle/>
                     <a:p>
-                      <a:pPr marL="0" indent="0" algn="l">
+                      <a:pPr algn="l" indent="0" marL="0">
                         <a:buNone/>
                       </a:pPr>
                       <a:r>
@@ -8534,7 +8359,7 @@
                     <a:bodyPr/>
                     <a:lstStyle/>
                     <a:p>
-                      <a:pPr marL="0" indent="0" algn="r">
+                      <a:pPr algn="r" indent="0" marL="0">
                         <a:buNone/>
                       </a:pPr>
                       <a:r>
@@ -8602,7 +8427,7 @@
                     <a:bodyPr/>
                     <a:lstStyle/>
                     <a:p>
-                      <a:pPr marL="0" indent="0" algn="r">
+                      <a:pPr algn="r" indent="0" marL="0">
                         <a:buNone/>
                       </a:pPr>
                       <a:r>
@@ -8670,7 +8495,7 @@
                     <a:bodyPr/>
                     <a:lstStyle/>
                     <a:p>
-                      <a:pPr marL="0" indent="0" algn="r">
+                      <a:pPr algn="r" indent="0" marL="0">
                         <a:buNone/>
                       </a:pPr>
                       <a:r>
@@ -8738,7 +8563,7 @@
                     <a:bodyPr/>
                     <a:lstStyle/>
                     <a:p>
-                      <a:pPr marL="0" indent="0" algn="l">
+                      <a:pPr algn="l" indent="0" marL="0">
                         <a:buNone/>
                       </a:pPr>
                       <a:r>
@@ -8806,7 +8631,7 @@
                     <a:bodyPr/>
                     <a:lstStyle/>
                     <a:p>
-                      <a:pPr marL="0" indent="0" algn="r">
+                      <a:pPr algn="r" indent="0" marL="0">
                         <a:buNone/>
                       </a:pPr>
                       <a:r>
@@ -8874,7 +8699,7 @@
                     <a:bodyPr/>
                     <a:lstStyle/>
                     <a:p>
-                      <a:pPr marL="0" indent="0" algn="r">
+                      <a:pPr algn="r" indent="0" marL="0">
                         <a:buNone/>
                       </a:pPr>
                       <a:r>
@@ -8942,7 +8767,7 @@
                     <a:bodyPr/>
                     <a:lstStyle/>
                     <a:p>
-                      <a:pPr marL="0" indent="0" algn="r">
+                      <a:pPr algn="r" indent="0" marL="0">
                         <a:buNone/>
                       </a:pPr>
                       <a:r>
@@ -9005,11 +8830,6 @@
                     </a:solidFill>
                   </a:tcPr>
                 </a:tc>
-                <a:extLst>
-                  <a:ext uri="{0D108BD9-81ED-4DB2-BD59-A6C34878D82A}">
-                    <a16:rowId xmlns:a16="http://schemas.microsoft.com/office/drawing/2014/main" val="10004"/>
-                  </a:ext>
-                </a:extLst>
               </a:tr>
               <a:tr h="246888">
                 <a:tc>
@@ -9017,7 +8837,7 @@
                     <a:bodyPr/>
                     <a:lstStyle/>
                     <a:p>
-                      <a:pPr marL="0" indent="0" algn="l">
+                      <a:pPr algn="l" indent="0" marL="0">
                         <a:buNone/>
                       </a:pPr>
                       <a:r>
@@ -9085,7 +8905,7 @@
                     <a:bodyPr/>
                     <a:lstStyle/>
                     <a:p>
-                      <a:pPr marL="0" indent="0" algn="r">
+                      <a:pPr algn="r" indent="0" marL="0">
                         <a:buNone/>
                       </a:pPr>
                       <a:r>
@@ -9153,7 +8973,7 @@
                     <a:bodyPr/>
                     <a:lstStyle/>
                     <a:p>
-                      <a:pPr marL="0" indent="0" algn="r">
+                      <a:pPr algn="r" indent="0" marL="0">
                         <a:buNone/>
                       </a:pPr>
                       <a:r>
@@ -9221,7 +9041,7 @@
                     <a:bodyPr/>
                     <a:lstStyle/>
                     <a:p>
-                      <a:pPr marL="0" indent="0" algn="r">
+                      <a:pPr algn="r" indent="0" marL="0">
                         <a:buNone/>
                       </a:pPr>
                       <a:r>
@@ -9289,7 +9109,7 @@
                     <a:bodyPr/>
                     <a:lstStyle/>
                     <a:p>
-                      <a:pPr marL="0" indent="0" algn="l">
+                      <a:pPr algn="l" indent="0" marL="0">
                         <a:buNone/>
                       </a:pPr>
                       <a:r>
@@ -9357,7 +9177,7 @@
                     <a:bodyPr/>
                     <a:lstStyle/>
                     <a:p>
-                      <a:pPr marL="0" indent="0" algn="r">
+                      <a:pPr algn="r" indent="0" marL="0">
                         <a:buNone/>
                       </a:pPr>
                       <a:r>
@@ -9425,7 +9245,7 @@
                     <a:bodyPr/>
                     <a:lstStyle/>
                     <a:p>
-                      <a:pPr marL="0" indent="0" algn="r">
+                      <a:pPr algn="r" indent="0" marL="0">
                         <a:buNone/>
                       </a:pPr>
                       <a:r>
@@ -9493,7 +9313,7 @@
                     <a:bodyPr/>
                     <a:lstStyle/>
                     <a:p>
-                      <a:pPr marL="0" indent="0" algn="r">
+                      <a:pPr algn="r" indent="0" marL="0">
                         <a:buNone/>
                       </a:pPr>
                       <a:r>
@@ -9556,11 +9376,6 @@
                     </a:solidFill>
                   </a:tcPr>
                 </a:tc>
-                <a:extLst>
-                  <a:ext uri="{0D108BD9-81ED-4DB2-BD59-A6C34878D82A}">
-                    <a16:rowId xmlns:a16="http://schemas.microsoft.com/office/drawing/2014/main" val="10005"/>
-                  </a:ext>
-                </a:extLst>
               </a:tr>
               <a:tr h="246888">
                 <a:tc>
@@ -9568,7 +9383,7 @@
                     <a:bodyPr/>
                     <a:lstStyle/>
                     <a:p>
-                      <a:pPr marL="0" indent="0" algn="l">
+                      <a:pPr algn="l" indent="0" marL="0">
                         <a:buNone/>
                       </a:pPr>
                       <a:r>
@@ -9636,7 +9451,7 @@
                     <a:bodyPr/>
                     <a:lstStyle/>
                     <a:p>
-                      <a:pPr marL="0" indent="0" algn="r">
+                      <a:pPr algn="r" indent="0" marL="0">
                         <a:buNone/>
                       </a:pPr>
                       <a:r>
@@ -9704,7 +9519,7 @@
                     <a:bodyPr/>
                     <a:lstStyle/>
                     <a:p>
-                      <a:pPr marL="0" indent="0" algn="r">
+                      <a:pPr algn="r" indent="0" marL="0">
                         <a:buNone/>
                       </a:pPr>
                       <a:r>
@@ -9772,7 +9587,7 @@
                     <a:bodyPr/>
                     <a:lstStyle/>
                     <a:p>
-                      <a:pPr marL="0" indent="0" algn="r">
+                      <a:pPr algn="r" indent="0" marL="0">
                         <a:buNone/>
                       </a:pPr>
                       <a:r>
@@ -9840,7 +9655,7 @@
                     <a:bodyPr/>
                     <a:lstStyle/>
                     <a:p>
-                      <a:pPr marL="0" indent="0" algn="l">
+                      <a:pPr algn="l" indent="0" marL="0">
                         <a:buNone/>
                       </a:pPr>
                       <a:r>
@@ -9908,7 +9723,7 @@
                     <a:bodyPr/>
                     <a:lstStyle/>
                     <a:p>
-                      <a:pPr marL="0" indent="0" algn="r">
+                      <a:pPr algn="r" indent="0" marL="0">
                         <a:buNone/>
                       </a:pPr>
                       <a:r>
@@ -9976,7 +9791,7 @@
                     <a:bodyPr/>
                     <a:lstStyle/>
                     <a:p>
-                      <a:pPr marL="0" indent="0" algn="r">
+                      <a:pPr algn="r" indent="0" marL="0">
                         <a:buNone/>
                       </a:pPr>
                       <a:r>
@@ -10044,7 +9859,7 @@
                     <a:bodyPr/>
                     <a:lstStyle/>
                     <a:p>
-                      <a:pPr marL="0" indent="0" algn="r">
+                      <a:pPr algn="r" indent="0" marL="0">
                         <a:buNone/>
                       </a:pPr>
                       <a:r>
@@ -10107,11 +9922,6 @@
                     </a:solidFill>
                   </a:tcPr>
                 </a:tc>
-                <a:extLst>
-                  <a:ext uri="{0D108BD9-81ED-4DB2-BD59-A6C34878D82A}">
-                    <a16:rowId xmlns:a16="http://schemas.microsoft.com/office/drawing/2014/main" val="10006"/>
-                  </a:ext>
-                </a:extLst>
               </a:tr>
               <a:tr h="246888">
                 <a:tc>
@@ -10119,7 +9929,7 @@
                     <a:bodyPr/>
                     <a:lstStyle/>
                     <a:p>
-                      <a:pPr marL="0" indent="0" algn="l">
+                      <a:pPr algn="l" indent="0" marL="0">
                         <a:buNone/>
                       </a:pPr>
                       <a:r>
@@ -10187,7 +9997,7 @@
                     <a:bodyPr/>
                     <a:lstStyle/>
                     <a:p>
-                      <a:pPr marL="0" indent="0" algn="r">
+                      <a:pPr algn="r" indent="0" marL="0">
                         <a:buNone/>
                       </a:pPr>
                       <a:r>
@@ -10255,7 +10065,7 @@
                     <a:bodyPr/>
                     <a:lstStyle/>
                     <a:p>
-                      <a:pPr marL="0" indent="0" algn="r">
+                      <a:pPr algn="r" indent="0" marL="0">
                         <a:buNone/>
                       </a:pPr>
                       <a:r>
@@ -10323,7 +10133,7 @@
                     <a:bodyPr/>
                     <a:lstStyle/>
                     <a:p>
-                      <a:pPr marL="0" indent="0" algn="r">
+                      <a:pPr algn="r" indent="0" marL="0">
                         <a:buNone/>
                       </a:pPr>
                       <a:r>
@@ -10391,7 +10201,7 @@
                     <a:bodyPr/>
                     <a:lstStyle/>
                     <a:p>
-                      <a:pPr marL="0" indent="0" algn="l">
+                      <a:pPr algn="l" indent="0" marL="0">
                         <a:buNone/>
                       </a:pPr>
                       <a:r>
@@ -10459,7 +10269,7 @@
                     <a:bodyPr/>
                     <a:lstStyle/>
                     <a:p>
-                      <a:pPr marL="0" indent="0" algn="r">
+                      <a:pPr algn="r" indent="0" marL="0">
                         <a:buNone/>
                       </a:pPr>
                       <a:r>
@@ -10527,7 +10337,7 @@
                     <a:bodyPr/>
                     <a:lstStyle/>
                     <a:p>
-                      <a:pPr marL="0" indent="0" algn="r">
+                      <a:pPr algn="r" indent="0" marL="0">
                         <a:buNone/>
                       </a:pPr>
                       <a:r>
@@ -10595,7 +10405,7 @@
                     <a:bodyPr/>
                     <a:lstStyle/>
                     <a:p>
-                      <a:pPr marL="0" indent="0" algn="r">
+                      <a:pPr algn="r" indent="0" marL="0">
                         <a:buNone/>
                       </a:pPr>
                       <a:r>
@@ -10658,11 +10468,6 @@
                     </a:solidFill>
                   </a:tcPr>
                 </a:tc>
-                <a:extLst>
-                  <a:ext uri="{0D108BD9-81ED-4DB2-BD59-A6C34878D82A}">
-                    <a16:rowId xmlns:a16="http://schemas.microsoft.com/office/drawing/2014/main" val="10007"/>
-                  </a:ext>
-                </a:extLst>
               </a:tr>
               <a:tr h="246888">
                 <a:tc>
@@ -10670,7 +10475,7 @@
                     <a:bodyPr/>
                     <a:lstStyle/>
                     <a:p>
-                      <a:pPr marL="0" indent="0" algn="l">
+                      <a:pPr algn="l" indent="0" marL="0">
                         <a:buNone/>
                       </a:pPr>
                       <a:r>
@@ -10738,7 +10543,7 @@
                     <a:bodyPr/>
                     <a:lstStyle/>
                     <a:p>
-                      <a:pPr marL="0" indent="0" algn="r">
+                      <a:pPr algn="r" indent="0" marL="0">
                         <a:buNone/>
                       </a:pPr>
                       <a:r>
@@ -10806,7 +10611,7 @@
                     <a:bodyPr/>
                     <a:lstStyle/>
                     <a:p>
-                      <a:pPr marL="0" indent="0" algn="r">
+                      <a:pPr algn="r" indent="0" marL="0">
                         <a:buNone/>
                       </a:pPr>
                       <a:r>
@@ -10874,7 +10679,7 @@
                     <a:bodyPr/>
                     <a:lstStyle/>
                     <a:p>
-                      <a:pPr marL="0" indent="0" algn="r">
+                      <a:pPr algn="r" indent="0" marL="0">
                         <a:buNone/>
                       </a:pPr>
                       <a:r>
@@ -10942,7 +10747,7 @@
                     <a:bodyPr/>
                     <a:lstStyle/>
                     <a:p>
-                      <a:pPr marL="0" indent="0" algn="l">
+                      <a:pPr algn="l" indent="0" marL="0">
                         <a:buNone/>
                       </a:pPr>
                       <a:r>
@@ -11010,7 +10815,7 @@
                     <a:bodyPr/>
                     <a:lstStyle/>
                     <a:p>
-                      <a:pPr marL="0" indent="0" algn="r">
+                      <a:pPr algn="r" indent="0" marL="0">
                         <a:buNone/>
                       </a:pPr>
                       <a:r>
@@ -11078,7 +10883,7 @@
                     <a:bodyPr/>
                     <a:lstStyle/>
                     <a:p>
-                      <a:pPr marL="0" indent="0" algn="r">
+                      <a:pPr algn="r" indent="0" marL="0">
                         <a:buNone/>
                       </a:pPr>
                       <a:r>
@@ -11146,7 +10951,7 @@
                     <a:bodyPr/>
                     <a:lstStyle/>
                     <a:p>
-                      <a:pPr marL="0" indent="0" algn="r">
+                      <a:pPr algn="r" indent="0" marL="0">
                         <a:buNone/>
                       </a:pPr>
                       <a:r>
@@ -11209,11 +11014,6 @@
                     </a:solidFill>
                   </a:tcPr>
                 </a:tc>
-                <a:extLst>
-                  <a:ext uri="{0D108BD9-81ED-4DB2-BD59-A6C34878D82A}">
-                    <a16:rowId xmlns:a16="http://schemas.microsoft.com/office/drawing/2014/main" val="10008"/>
-                  </a:ext>
-                </a:extLst>
               </a:tr>
               <a:tr h="246888">
                 <a:tc>
@@ -11221,7 +11021,7 @@
                     <a:bodyPr/>
                     <a:lstStyle/>
                     <a:p>
-                      <a:pPr marL="0" indent="0" algn="l">
+                      <a:pPr algn="l" indent="0" marL="0">
                         <a:buNone/>
                       </a:pPr>
                       <a:r>
@@ -11289,7 +11089,7 @@
                     <a:bodyPr/>
                     <a:lstStyle/>
                     <a:p>
-                      <a:pPr marL="0" indent="0" algn="r">
+                      <a:pPr algn="r" indent="0" marL="0">
                         <a:buNone/>
                       </a:pPr>
                       <a:r>
@@ -11357,7 +11157,7 @@
                     <a:bodyPr/>
                     <a:lstStyle/>
                     <a:p>
-                      <a:pPr marL="0" indent="0" algn="r">
+                      <a:pPr algn="r" indent="0" marL="0">
                         <a:buNone/>
                       </a:pPr>
                       <a:r>
@@ -11425,7 +11225,7 @@
                     <a:bodyPr/>
                     <a:lstStyle/>
                     <a:p>
-                      <a:pPr marL="0" indent="0" algn="r">
+                      <a:pPr algn="r" indent="0" marL="0">
                         <a:buNone/>
                       </a:pPr>
                       <a:r>
@@ -11493,7 +11293,7 @@
                     <a:bodyPr/>
                     <a:lstStyle/>
                     <a:p>
-                      <a:pPr marL="0" indent="0" algn="l">
+                      <a:pPr algn="l" indent="0" marL="0">
                         <a:buNone/>
                       </a:pPr>
                       <a:r>
@@ -11561,7 +11361,7 @@
                     <a:bodyPr/>
                     <a:lstStyle/>
                     <a:p>
-                      <a:pPr marL="0" indent="0" algn="r">
+                      <a:pPr algn="r" indent="0" marL="0">
                         <a:buNone/>
                       </a:pPr>
                       <a:r>
@@ -11629,7 +11429,7 @@
                     <a:bodyPr/>
                     <a:lstStyle/>
                     <a:p>
-                      <a:pPr marL="0" indent="0" algn="r">
+                      <a:pPr algn="r" indent="0" marL="0">
                         <a:buNone/>
                       </a:pPr>
                       <a:r>
@@ -11697,7 +11497,7 @@
                     <a:bodyPr/>
                     <a:lstStyle/>
                     <a:p>
-                      <a:pPr marL="0" indent="0" algn="r">
+                      <a:pPr algn="r" indent="0" marL="0">
                         <a:buNone/>
                       </a:pPr>
                       <a:r>
@@ -11760,11 +11560,6 @@
                     </a:solidFill>
                   </a:tcPr>
                 </a:tc>
-                <a:extLst>
-                  <a:ext uri="{0D108BD9-81ED-4DB2-BD59-A6C34878D82A}">
-                    <a16:rowId xmlns:a16="http://schemas.microsoft.com/office/drawing/2014/main" val="10009"/>
-                  </a:ext>
-                </a:extLst>
               </a:tr>
               <a:tr h="246888">
                 <a:tc>
@@ -11772,7 +11567,7 @@
                     <a:bodyPr/>
                     <a:lstStyle/>
                     <a:p>
-                      <a:pPr marL="0" indent="0">
+                      <a:pPr indent="0" marL="0">
                         <a:buNone/>
                       </a:pPr>
                       <a:endParaRPr lang="en-US" sz="900" dirty="0">
@@ -11829,7 +11624,7 @@
                     <a:bodyPr/>
                     <a:lstStyle/>
                     <a:p>
-                      <a:pPr marL="0" indent="0">
+                      <a:pPr indent="0" marL="0">
                         <a:buNone/>
                       </a:pPr>
                       <a:endParaRPr lang="en-US" sz="900" dirty="0">
@@ -11886,7 +11681,7 @@
                     <a:bodyPr/>
                     <a:lstStyle/>
                     <a:p>
-                      <a:pPr marL="0" indent="0">
+                      <a:pPr indent="0" marL="0">
                         <a:buNone/>
                       </a:pPr>
                       <a:endParaRPr lang="en-US" sz="900" dirty="0">
@@ -11943,7 +11738,7 @@
                     <a:bodyPr/>
                     <a:lstStyle/>
                     <a:p>
-                      <a:pPr marL="0" indent="0">
+                      <a:pPr indent="0" marL="0">
                         <a:buNone/>
                       </a:pPr>
                       <a:endParaRPr lang="en-US" sz="900" dirty="0">
@@ -12000,7 +11795,7 @@
                     <a:bodyPr/>
                     <a:lstStyle/>
                     <a:p>
-                      <a:pPr marL="0" indent="0" algn="l">
+                      <a:pPr algn="l" indent="0" marL="0">
                         <a:buNone/>
                       </a:pPr>
                       <a:r>
@@ -12068,7 +11863,7 @@
                     <a:bodyPr/>
                     <a:lstStyle/>
                     <a:p>
-                      <a:pPr marL="0" indent="0" algn="r">
+                      <a:pPr algn="r" indent="0" marL="0">
                         <a:buNone/>
                       </a:pPr>
                       <a:r>
@@ -12136,7 +11931,7 @@
                     <a:bodyPr/>
                     <a:lstStyle/>
                     <a:p>
-                      <a:pPr marL="0" indent="0" algn="r">
+                      <a:pPr algn="r" indent="0" marL="0">
                         <a:buNone/>
                       </a:pPr>
                       <a:r>
@@ -12204,7 +11999,7 @@
                     <a:bodyPr/>
                     <a:lstStyle/>
                     <a:p>
-                      <a:pPr marL="0" indent="0" algn="r">
+                      <a:pPr algn="r" indent="0" marL="0">
                         <a:buNone/>
                       </a:pPr>
                       <a:r>
@@ -12267,11 +12062,6 @@
                     </a:solidFill>
                   </a:tcPr>
                 </a:tc>
-                <a:extLst>
-                  <a:ext uri="{0D108BD9-81ED-4DB2-BD59-A6C34878D82A}">
-                    <a16:rowId xmlns:a16="http://schemas.microsoft.com/office/drawing/2014/main" val="10010"/>
-                  </a:ext>
-                </a:extLst>
               </a:tr>
             </a:tbl>
           </a:graphicData>
@@ -12279,7 +12069,7 @@
       </p:graphicFrame>
       <p:sp>
         <p:nvSpPr>
-          <p:cNvPr id="4" name="Text 2"/>
+          <p:cNvPr id="5" name="Text 2"/>
           <p:cNvSpPr/>
           <p:nvPr/>
         </p:nvSpPr>
@@ -12298,7 +12088,7 @@
           <a:bodyPr wrap="square" lIns="0" tIns="0" rIns="0" bIns="0" rtlCol="0" anchor="ctr"/>
           <a:lstStyle/>
           <a:p>
-            <a:pPr marL="0" indent="0" algn="l">
+            <a:pPr algn="l" indent="0" marL="0">
               <a:buNone/>
             </a:pPr>
             <a:r>
@@ -12312,6 +12102,9 @@
               </a:rPr>
               <a:t>EuroTcl 2026</a:t>
             </a:r>
+            <a:pPr algn="l" indent="0" marL="0">
+              <a:buNone/>
+            </a:pPr>
             <a:r>
               <a:rPr lang="en-US" sz="900" dirty="0">
                 <a:solidFill>
@@ -12348,7 +12141,7 @@
           <a:bodyPr wrap="square" lIns="0" tIns="0" rIns="0" bIns="0" rtlCol="0" anchor="ctr"/>
           <a:lstStyle/>
           <a:p>
-            <a:pPr marL="0" indent="0" algn="r">
+            <a:pPr algn="r" indent="0" marL="0">
               <a:buNone/>
             </a:pPr>
             <a:r>
@@ -12382,7 +12175,6 @@
         <a:solidFill>
           <a:srgbClr val="000000"/>
         </a:solidFill>
-        <a:effectLst/>
       </p:bgPr>
     </p:bg>
     <p:spTree>
@@ -12420,7 +12212,7 @@
           <a:bodyPr wrap="square" lIns="0" tIns="0" rIns="0" bIns="0" rtlCol="0" anchor="ctr"/>
           <a:lstStyle/>
           <a:p>
-            <a:pPr marL="0" indent="0" algn="l">
+            <a:pPr algn="l" indent="0" marL="0">
               <a:buNone/>
             </a:pPr>
             <a:r>
@@ -12459,7 +12251,7 @@
           <a:bodyPr wrap="square" lIns="0" tIns="0" rIns="0" bIns="0" rtlCol="0" anchor="t"/>
           <a:lstStyle/>
           <a:p>
-            <a:pPr marL="0" indent="0" algn="l">
+            <a:pPr algn="l" indent="0" marL="0">
               <a:lnSpc>
                 <a:spcPct val="100000"/>
               </a:lnSpc>
@@ -12501,7 +12293,7 @@
           <a:bodyPr wrap="square" lIns="0" tIns="0" rIns="0" bIns="0" rtlCol="0" anchor="t"/>
           <a:lstStyle/>
           <a:p>
-            <a:pPr marL="0" indent="0" algn="l">
+            <a:pPr algn="l" indent="0" marL="0">
               <a:lnSpc>
                 <a:spcPct val="105000"/>
               </a:lnSpc>
@@ -12548,31 +12340,24 @@
             <a:prstDash val="solid"/>
           </a:ln>
           <a:effectLst>
-            <a:outerShdw blurRad="139700" dist="38100" dir="5400000" algn="bl" rotWithShape="0">
+            <a:outerShdw sx="100000" sy="100000" kx="0" ky="0" algn="bl" rotWithShape="0" blurRad="139700" dist="38100" dir="5400000">
               <a:srgbClr val="000000">
                 <a:alpha val="32000"/>
               </a:srgbClr>
             </a:outerShdw>
           </a:effectLst>
         </p:spPr>
-        <p:txBody>
-          <a:bodyPr/>
-          <a:lstStyle/>
-          <a:p>
-            <a:endParaRPr lang="en-US"/>
-          </a:p>
-        </p:txBody>
       </p:sp>
       <p:pic>
         <p:nvPicPr>
-          <p:cNvPr id="6" name="Image 0" descr="iWish borg iOS device bridge — Toast/Speak/Beep/Vibrate actions, brightness slider, and osbuildinfo device info showing manufacturer Apple"/>
+          <p:cNvPr id="6" name="Image 0" descr="iWish borg iOS device bridge — Toast/Speak/Beep/Vibrate actions, brightness slider, and osbuildinfo device info showing manufacturer Apple">    </p:cNvPr>
           <p:cNvPicPr>
             <a:picLocks noChangeAspect="1"/>
           </p:cNvPicPr>
           <p:nvPr/>
         </p:nvPicPr>
         <p:blipFill>
-          <a:blip r:embed="rId3"/>
+          <a:blip r:embed="rId1"/>
           <a:stretch>
             <a:fillRect/>
           </a:stretch>
@@ -12603,7 +12388,6 @@
         <a:solidFill>
           <a:srgbClr val="000000"/>
         </a:solidFill>
-        <a:effectLst/>
       </p:bgPr>
     </p:bg>
     <p:spTree>
@@ -12641,11 +12425,11 @@
           <a:bodyPr wrap="square" lIns="0" tIns="0" rIns="0" bIns="0" rtlCol="0" anchor="ctr"/>
           <a:lstStyle/>
           <a:p>
-            <a:pPr marL="0" indent="0" algn="l">
+            <a:pPr algn="l" indent="0" marL="0">
               <a:buNone/>
             </a:pPr>
             <a:r>
-              <a:rPr lang="en-US" sz="1200" b="1" kern="0" spc="250" dirty="0">
+              <a:rPr lang="en-US" sz="1200" b="1" spc="250" kern="0" dirty="0">
                 <a:solidFill>
                   <a:srgbClr val="E8552D"/>
                 </a:solidFill>
@@ -12680,7 +12464,7 @@
           <a:bodyPr wrap="square" lIns="0" tIns="0" rIns="0" bIns="0" rtlCol="0" anchor="t"/>
           <a:lstStyle/>
           <a:p>
-            <a:pPr marL="0" indent="0" algn="l">
+            <a:pPr algn="l" indent="0" marL="0">
               <a:lnSpc>
                 <a:spcPct val="98000"/>
               </a:lnSpc>
@@ -12722,7 +12506,7 @@
           <a:bodyPr wrap="square" lIns="0" tIns="0" rIns="0" bIns="0" rtlCol="0" anchor="t"/>
           <a:lstStyle/>
           <a:p>
-            <a:pPr marL="203200" indent="-203200" algn="l">
+            <a:pPr algn="l" marL="203200" indent="-203200">
               <a:spcAft>
                 <a:spcPts val="800"/>
               </a:spcAft>
@@ -12743,7 +12527,7 @@
             <a:endParaRPr lang="en-US" sz="1550" dirty="0"/>
           </a:p>
           <a:p>
-            <a:pPr marL="203200" indent="-203200" algn="l">
+            <a:pPr algn="l" marL="203200" indent="-203200">
               <a:spcAft>
                 <a:spcPts val="800"/>
               </a:spcAft>
@@ -12764,7 +12548,7 @@
             <a:endParaRPr lang="en-US" sz="1550" dirty="0"/>
           </a:p>
           <a:p>
-            <a:pPr marL="203200" indent="-203200" algn="l">
+            <a:pPr algn="l" marL="203200" indent="-203200">
               <a:spcAft>
                 <a:spcPts val="800"/>
               </a:spcAft>
@@ -12785,7 +12569,7 @@
             <a:endParaRPr lang="en-US" sz="1550" dirty="0"/>
           </a:p>
           <a:p>
-            <a:pPr marL="203200" indent="-203200" algn="l">
+            <a:pPr algn="l" marL="203200" indent="-203200">
               <a:spcAft>
                 <a:spcPts val="800"/>
               </a:spcAft>
@@ -12806,7 +12590,7 @@
             <a:endParaRPr lang="en-US" sz="1550" dirty="0"/>
           </a:p>
           <a:p>
-            <a:pPr marL="203200" indent="-203200" algn="l">
+            <a:pPr algn="l" marL="203200" indent="-203200">
               <a:spcAft>
                 <a:spcPts val="800"/>
               </a:spcAft>
@@ -12854,20 +12638,13 @@
             <a:prstDash val="solid"/>
           </a:ln>
           <a:effectLst>
-            <a:outerShdw blurRad="101600" dist="38100" dir="5400000" algn="bl" rotWithShape="0">
+            <a:outerShdw sx="100000" sy="100000" kx="0" ky="0" algn="bl" rotWithShape="0" blurRad="101600" dist="38100" dir="5400000">
               <a:srgbClr val="000000">
                 <a:alpha val="10000"/>
               </a:srgbClr>
             </a:outerShdw>
           </a:effectLst>
         </p:spPr>
-        <p:txBody>
-          <a:bodyPr/>
-          <a:lstStyle/>
-          <a:p>
-            <a:endParaRPr lang="en-US"/>
-          </a:p>
-        </p:txBody>
       </p:sp>
       <p:sp>
         <p:nvSpPr>
@@ -12888,31 +12665,24 @@
           </a:solidFill>
           <a:ln/>
           <a:effectLst>
-            <a:outerShdw blurRad="76200" dist="25400" dir="5400000" algn="bl" rotWithShape="0">
+            <a:outerShdw sx="100000" sy="100000" kx="0" ky="0" algn="bl" rotWithShape="0" blurRad="76200" dist="25400" dir="5400000">
               <a:srgbClr val="000000">
                 <a:alpha val="18000"/>
               </a:srgbClr>
             </a:outerShdw>
           </a:effectLst>
         </p:spPr>
-        <p:txBody>
-          <a:bodyPr/>
-          <a:lstStyle/>
-          <a:p>
-            <a:endParaRPr lang="en-US"/>
-          </a:p>
-        </p:txBody>
       </p:sp>
       <p:pic>
         <p:nvPicPr>
-          <p:cNvPr id="7" name="Image 0" descr="preencoded.png"/>
+          <p:cNvPr id="7" name="Image 0" descr="preencoded.png">    </p:cNvPr>
           <p:cNvPicPr>
             <a:picLocks noChangeAspect="1"/>
           </p:cNvPicPr>
           <p:nvPr/>
         </p:nvPicPr>
         <p:blipFill>
-          <a:blip r:embed="rId3"/>
+          <a:blip r:embed="rId1"/>
           <a:stretch>
             <a:fillRect/>
           </a:stretch>
@@ -12948,7 +12718,7 @@
           <a:bodyPr wrap="square" lIns="0" tIns="0" rIns="0" bIns="0" rtlCol="0" anchor="ctr"/>
           <a:lstStyle/>
           <a:p>
-            <a:pPr marL="0" indent="0">
+            <a:pPr indent="0" marL="0">
               <a:buNone/>
             </a:pPr>
             <a:r>
@@ -12987,7 +12757,7 @@
           <a:bodyPr wrap="square" lIns="0" tIns="0" rIns="0" bIns="0" rtlCol="0" anchor="t"/>
           <a:lstStyle/>
           <a:p>
-            <a:pPr marL="0" indent="0">
+            <a:pPr indent="0" marL="0">
               <a:lnSpc>
                 <a:spcPct val="105000"/>
               </a:lnSpc>
@@ -13029,7 +12799,7 @@
           <a:bodyPr wrap="square" lIns="0" tIns="0" rIns="0" bIns="0" rtlCol="0" anchor="ctr"/>
           <a:lstStyle/>
           <a:p>
-            <a:pPr marL="0" indent="0" algn="l">
+            <a:pPr algn="l" indent="0" marL="0">
               <a:buNone/>
             </a:pPr>
             <a:r>
@@ -13043,6 +12813,9 @@
               </a:rPr>
               <a:t>EuroTcl 2026</a:t>
             </a:r>
+            <a:pPr algn="l" indent="0" marL="0">
+              <a:buNone/>
+            </a:pPr>
             <a:r>
               <a:rPr lang="en-US" sz="900" dirty="0">
                 <a:solidFill>
@@ -13079,7 +12852,7 @@
           <a:bodyPr wrap="square" lIns="0" tIns="0" rIns="0" bIns="0" rtlCol="0" anchor="ctr"/>
           <a:lstStyle/>
           <a:p>
-            <a:pPr marL="0" indent="0" algn="r">
+            <a:pPr algn="r" indent="0" marL="0">
               <a:buNone/>
             </a:pPr>
             <a:r>
@@ -13113,7 +12886,6 @@
         <a:solidFill>
           <a:srgbClr val="000000"/>
         </a:solidFill>
-        <a:effectLst/>
       </p:bgPr>
     </p:bg>
     <p:spTree>
@@ -13151,11 +12923,11 @@
           <a:bodyPr wrap="square" lIns="0" tIns="0" rIns="0" bIns="0" rtlCol="0" anchor="ctr"/>
           <a:lstStyle/>
           <a:p>
-            <a:pPr marL="0" indent="0" algn="l">
+            <a:pPr algn="l" indent="0" marL="0">
               <a:buNone/>
             </a:pPr>
             <a:r>
-              <a:rPr lang="en-US" sz="1200" b="1" kern="0" spc="250" dirty="0">
+              <a:rPr lang="en-US" sz="1200" b="1" spc="250" kern="0" dirty="0">
                 <a:solidFill>
                   <a:srgbClr val="E8552D"/>
                 </a:solidFill>
@@ -13190,7 +12962,7 @@
           <a:bodyPr wrap="square" lIns="0" tIns="0" rIns="0" bIns="0" rtlCol="0" anchor="t"/>
           <a:lstStyle/>
           <a:p>
-            <a:pPr marL="0" indent="0" algn="l">
+            <a:pPr algn="l" indent="0" marL="0">
               <a:lnSpc>
                 <a:spcPct val="98000"/>
               </a:lnSpc>
@@ -13232,7 +13004,7 @@
           <a:bodyPr wrap="square" lIns="0" tIns="0" rIns="0" bIns="0" rtlCol="0" anchor="t"/>
           <a:lstStyle/>
           <a:p>
-            <a:pPr marL="203200" indent="-203200" algn="l">
+            <a:pPr algn="l" marL="203200" indent="-203200">
               <a:spcAft>
                 <a:spcPts val="800"/>
               </a:spcAft>
@@ -13253,7 +13025,7 @@
             <a:endParaRPr lang="en-US" sz="1500" dirty="0"/>
           </a:p>
           <a:p>
-            <a:pPr marL="203200" indent="-203200" algn="l">
+            <a:pPr algn="l" marL="203200" indent="-203200">
               <a:spcAft>
                 <a:spcPts val="800"/>
               </a:spcAft>
@@ -13274,7 +13046,7 @@
             <a:endParaRPr lang="en-US" sz="1500" dirty="0"/>
           </a:p>
           <a:p>
-            <a:pPr marL="203200" indent="-203200" algn="l">
+            <a:pPr algn="l" marL="203200" indent="-203200">
               <a:spcAft>
                 <a:spcPts val="800"/>
               </a:spcAft>
@@ -13295,7 +13067,7 @@
             <a:endParaRPr lang="en-US" sz="1500" dirty="0"/>
           </a:p>
           <a:p>
-            <a:pPr marL="203200" indent="-203200" algn="l">
+            <a:pPr algn="l" marL="203200" indent="-203200">
               <a:spcAft>
                 <a:spcPts val="800"/>
               </a:spcAft>
@@ -13316,7 +13088,7 @@
             <a:endParaRPr lang="en-US" sz="1500" dirty="0"/>
           </a:p>
           <a:p>
-            <a:pPr marL="203200" indent="-203200" algn="l">
+            <a:pPr algn="l" marL="203200" indent="-203200">
               <a:spcAft>
                 <a:spcPts val="800"/>
               </a:spcAft>
@@ -13364,20 +13136,13 @@
             <a:prstDash val="solid"/>
           </a:ln>
           <a:effectLst>
-            <a:outerShdw blurRad="101600" dist="38100" dir="5400000" algn="bl" rotWithShape="0">
+            <a:outerShdw sx="100000" sy="100000" kx="0" ky="0" algn="bl" rotWithShape="0" blurRad="101600" dist="38100" dir="5400000">
               <a:srgbClr val="000000">
                 <a:alpha val="10000"/>
               </a:srgbClr>
             </a:outerShdw>
           </a:effectLst>
         </p:spPr>
-        <p:txBody>
-          <a:bodyPr/>
-          <a:lstStyle/>
-          <a:p>
-            <a:endParaRPr lang="en-US"/>
-          </a:p>
-        </p:txBody>
       </p:sp>
       <p:sp>
         <p:nvSpPr>
@@ -13398,31 +13163,24 @@
           </a:solidFill>
           <a:ln/>
           <a:effectLst>
-            <a:outerShdw blurRad="76200" dist="25400" dir="5400000" algn="bl" rotWithShape="0">
+            <a:outerShdw sx="100000" sy="100000" kx="0" ky="0" algn="bl" rotWithShape="0" blurRad="76200" dist="25400" dir="5400000">
               <a:srgbClr val="000000">
                 <a:alpha val="18000"/>
               </a:srgbClr>
             </a:outerShdw>
           </a:effectLst>
         </p:spPr>
-        <p:txBody>
-          <a:bodyPr/>
-          <a:lstStyle/>
-          <a:p>
-            <a:endParaRPr lang="en-US"/>
-          </a:p>
-        </p:txBody>
       </p:sp>
       <p:pic>
         <p:nvPicPr>
-          <p:cNvPr id="7" name="Image 0" descr="preencoded.png"/>
+          <p:cNvPr id="7" name="Image 0" descr="preencoded.png">    </p:cNvPr>
           <p:cNvPicPr>
             <a:picLocks noChangeAspect="1"/>
           </p:cNvPicPr>
           <p:nvPr/>
         </p:nvPicPr>
         <p:blipFill>
-          <a:blip r:embed="rId3"/>
+          <a:blip r:embed="rId1"/>
           <a:stretch>
             <a:fillRect/>
           </a:stretch>
@@ -13458,7 +13216,7 @@
           <a:bodyPr wrap="square" lIns="0" tIns="0" rIns="0" bIns="0" rtlCol="0" anchor="ctr"/>
           <a:lstStyle/>
           <a:p>
-            <a:pPr marL="0" indent="0">
+            <a:pPr indent="0" marL="0">
               <a:buNone/>
             </a:pPr>
             <a:r>
@@ -13497,7 +13255,7 @@
           <a:bodyPr wrap="square" lIns="0" tIns="0" rIns="0" bIns="0" rtlCol="0" anchor="t"/>
           <a:lstStyle/>
           <a:p>
-            <a:pPr marL="0" indent="0">
+            <a:pPr indent="0" marL="0">
               <a:lnSpc>
                 <a:spcPct val="105000"/>
               </a:lnSpc>
@@ -13539,7 +13297,7 @@
           <a:bodyPr wrap="square" lIns="0" tIns="0" rIns="0" bIns="0" rtlCol="0" anchor="ctr"/>
           <a:lstStyle/>
           <a:p>
-            <a:pPr marL="0" indent="0" algn="l">
+            <a:pPr algn="l" indent="0" marL="0">
               <a:buNone/>
             </a:pPr>
             <a:r>
@@ -13553,6 +13311,9 @@
               </a:rPr>
               <a:t>EuroTcl 2026</a:t>
             </a:r>
+            <a:pPr algn="l" indent="0" marL="0">
+              <a:buNone/>
+            </a:pPr>
             <a:r>
               <a:rPr lang="en-US" sz="900" dirty="0">
                 <a:solidFill>
@@ -13589,7 +13350,7 @@
           <a:bodyPr wrap="square" lIns="0" tIns="0" rIns="0" bIns="0" rtlCol="0" anchor="ctr"/>
           <a:lstStyle/>
           <a:p>
-            <a:pPr marL="0" indent="0" algn="r">
+            <a:pPr algn="r" indent="0" marL="0">
               <a:buNone/>
             </a:pPr>
             <a:r>
@@ -13623,7 +13384,6 @@
         <a:solidFill>
           <a:srgbClr val="000000"/>
         </a:solidFill>
-        <a:effectLst/>
       </p:bgPr>
     </p:bg>
     <p:spTree>
@@ -13661,11 +13421,11 @@
           <a:bodyPr wrap="square" lIns="0" tIns="0" rIns="0" bIns="0" rtlCol="0" anchor="ctr"/>
           <a:lstStyle/>
           <a:p>
-            <a:pPr marL="0" indent="0" algn="l">
+            <a:pPr algn="l" indent="0" marL="0">
               <a:buNone/>
             </a:pPr>
             <a:r>
-              <a:rPr lang="en-US" sz="1200" b="1" kern="0" spc="250" dirty="0">
+              <a:rPr lang="en-US" sz="1200" b="1" spc="250" kern="0" dirty="0">
                 <a:solidFill>
                   <a:srgbClr val="E8552D"/>
                 </a:solidFill>
@@ -13700,7 +13460,7 @@
           <a:bodyPr wrap="square" lIns="0" tIns="0" rIns="0" bIns="0" rtlCol="0" anchor="t"/>
           <a:lstStyle/>
           <a:p>
-            <a:pPr marL="0" indent="0" algn="l">
+            <a:pPr algn="l" indent="0" marL="0">
               <a:lnSpc>
                 <a:spcPct val="98000"/>
               </a:lnSpc>
@@ -13747,20 +13507,13 @@
             <a:prstDash val="solid"/>
           </a:ln>
           <a:effectLst>
-            <a:outerShdw blurRad="114300" dist="38100" dir="5400000" algn="bl" rotWithShape="0">
+            <a:outerShdw sx="100000" sy="100000" kx="0" ky="0" algn="bl" rotWithShape="0" blurRad="114300" dist="38100" dir="5400000">
               <a:srgbClr val="000000">
                 <a:alpha val="22000"/>
               </a:srgbClr>
             </a:outerShdw>
           </a:effectLst>
         </p:spPr>
-        <p:txBody>
-          <a:bodyPr/>
-          <a:lstStyle/>
-          <a:p>
-            <a:endParaRPr lang="en-US"/>
-          </a:p>
-        </p:txBody>
       </p:sp>
       <p:sp>
         <p:nvSpPr>
@@ -13781,13 +13534,6 @@
           </a:solidFill>
           <a:ln/>
         </p:spPr>
-        <p:txBody>
-          <a:bodyPr/>
-          <a:lstStyle/>
-          <a:p>
-            <a:endParaRPr lang="en-US"/>
-          </a:p>
-        </p:txBody>
       </p:sp>
       <p:sp>
         <p:nvSpPr>
@@ -13808,13 +13554,6 @@
           </a:solidFill>
           <a:ln/>
         </p:spPr>
-        <p:txBody>
-          <a:bodyPr/>
-          <a:lstStyle/>
-          <a:p>
-            <a:endParaRPr lang="en-US"/>
-          </a:p>
-        </p:txBody>
       </p:sp>
       <p:sp>
         <p:nvSpPr>
@@ -13835,13 +13574,6 @@
           </a:solidFill>
           <a:ln/>
         </p:spPr>
-        <p:txBody>
-          <a:bodyPr/>
-          <a:lstStyle/>
-          <a:p>
-            <a:endParaRPr lang="en-US"/>
-          </a:p>
-        </p:txBody>
       </p:sp>
       <p:sp>
         <p:nvSpPr>
@@ -13864,7 +13596,7 @@
           <a:bodyPr wrap="square" lIns="0" tIns="0" rIns="0" bIns="0" rtlCol="0" anchor="ctr"/>
           <a:lstStyle/>
           <a:p>
-            <a:pPr marL="0" indent="0" algn="l">
+            <a:pPr algn="l" indent="0" marL="0">
               <a:buNone/>
             </a:pPr>
             <a:r>
@@ -13903,7 +13635,7 @@
           <a:bodyPr wrap="square" lIns="0" tIns="0" rIns="0" bIns="0" rtlCol="0" anchor="t"/>
           <a:lstStyle/>
           <a:p>
-            <a:pPr marL="0" indent="0" algn="l">
+            <a:pPr algn="l" indent="0" marL="0">
               <a:lnSpc>
                 <a:spcPct val="112000"/>
               </a:lnSpc>
@@ -13923,7 +13655,7 @@
             <a:endParaRPr lang="en-US" sz="1150" dirty="0"/>
           </a:p>
           <a:p>
-            <a:pPr marL="0" indent="0" algn="l">
+            <a:pPr algn="l" indent="0" marL="0">
               <a:lnSpc>
                 <a:spcPct val="112000"/>
               </a:lnSpc>
@@ -13940,21 +13672,7 @@
               </a:rPr>
               <a:t>borg speak </a:t>
             </a:r>
-            <a:r>
-              <a:rPr lang="en-US" sz="1150" dirty="0">
-                <a:solidFill>
-                  <a:srgbClr val="F2B233"/>
-                </a:solidFill>
-                <a:latin typeface="Courier New" pitchFamily="34" charset="0"/>
-                <a:ea typeface="Courier New" pitchFamily="34" charset="-122"/>
-                <a:cs typeface="Courier New" pitchFamily="34" charset="-120"/>
-              </a:rPr>
-              <a:t>"Shot ready"</a:t>
-            </a:r>
-            <a:endParaRPr lang="en-US" sz="1150" dirty="0"/>
-          </a:p>
-          <a:p>
-            <a:pPr marL="0" indent="0" algn="l">
+            <a:pPr algn="l" indent="0" marL="0">
               <a:lnSpc>
                 <a:spcPct val="112000"/>
               </a:lnSpc>
@@ -13963,29 +13681,18 @@
             <a:r>
               <a:rPr lang="en-US" sz="1150" dirty="0">
                 <a:solidFill>
-                  <a:srgbClr val="D7E0EC"/>
+                  <a:srgbClr val="F2B233"/>
                 </a:solidFill>
                 <a:latin typeface="Courier New" pitchFamily="34" charset="0"/>
                 <a:ea typeface="Courier New" pitchFamily="34" charset="-122"/>
                 <a:cs typeface="Courier New" pitchFamily="34" charset="-120"/>
               </a:rPr>
-              <a:t>borg toast </a:t>
-            </a:r>
-            <a:r>
-              <a:rPr lang="en-US" sz="1150" dirty="0">
-                <a:solidFill>
-                  <a:srgbClr val="F2B233"/>
-                </a:solidFill>
-                <a:latin typeface="Courier New" pitchFamily="34" charset="0"/>
-                <a:ea typeface="Courier New" pitchFamily="34" charset="-122"/>
-                <a:cs typeface="Courier New" pitchFamily="34" charset="-120"/>
-              </a:rPr>
-              <a:t>"Saved"</a:t>
+              <a:t>"Shot ready"</a:t>
             </a:r>
             <a:endParaRPr lang="en-US" sz="1150" dirty="0"/>
           </a:p>
           <a:p>
-            <a:pPr marL="0" indent="0" algn="l">
+            <a:pPr algn="l" indent="0" marL="0">
               <a:lnSpc>
                 <a:spcPct val="112000"/>
               </a:lnSpc>
@@ -14000,12 +13707,9 @@
                 <a:ea typeface="Courier New" pitchFamily="34" charset="-122"/>
                 <a:cs typeface="Courier New" pitchFamily="34" charset="-120"/>
               </a:rPr>
-              <a:t>borg beep</a:t>
-            </a:r>
-            <a:endParaRPr lang="en-US" sz="1150" dirty="0"/>
-          </a:p>
-          <a:p>
-            <a:pPr marL="0" indent="0" algn="l">
+              <a:t>borg toast </a:t>
+            </a:r>
+            <a:pPr algn="l" indent="0" marL="0">
               <a:lnSpc>
                 <a:spcPct val="112000"/>
               </a:lnSpc>
@@ -14014,18 +13718,18 @@
             <a:r>
               <a:rPr lang="en-US" sz="1150" dirty="0">
                 <a:solidFill>
-                  <a:srgbClr val="D7E0EC"/>
+                  <a:srgbClr val="F2B233"/>
                 </a:solidFill>
                 <a:latin typeface="Courier New" pitchFamily="34" charset="0"/>
                 <a:ea typeface="Courier New" pitchFamily="34" charset="-122"/>
                 <a:cs typeface="Courier New" pitchFamily="34" charset="-120"/>
               </a:rPr>
-              <a:t> </a:t>
+              <a:t>"Saved"</a:t>
             </a:r>
             <a:endParaRPr lang="en-US" sz="1150" dirty="0"/>
           </a:p>
           <a:p>
-            <a:pPr marL="0" indent="0" algn="l">
+            <a:pPr algn="l" indent="0" marL="0">
               <a:lnSpc>
                 <a:spcPct val="112000"/>
               </a:lnSpc>
@@ -14040,34 +13744,12 @@
                 <a:ea typeface="Courier New" pitchFamily="34" charset="-122"/>
                 <a:cs typeface="Courier New" pitchFamily="34" charset="-120"/>
               </a:rPr>
-              <a:t>set bi [</a:t>
-            </a:r>
-            <a:r>
-              <a:rPr lang="en-US" sz="1150" dirty="0">
-                <a:solidFill>
-                  <a:srgbClr val="1FB3A6"/>
-                </a:solidFill>
-                <a:latin typeface="Courier New" pitchFamily="34" charset="0"/>
-                <a:ea typeface="Courier New" pitchFamily="34" charset="-122"/>
-                <a:cs typeface="Courier New" pitchFamily="34" charset="-120"/>
-              </a:rPr>
-              <a:t>borg osbuildinfo</a:t>
-            </a:r>
-            <a:r>
-              <a:rPr lang="en-US" sz="1150" dirty="0">
-                <a:solidFill>
-                  <a:srgbClr val="D7E0EC"/>
-                </a:solidFill>
-                <a:latin typeface="Courier New" pitchFamily="34" charset="0"/>
-                <a:ea typeface="Courier New" pitchFamily="34" charset="-122"/>
-                <a:cs typeface="Courier New" pitchFamily="34" charset="-120"/>
-              </a:rPr>
-              <a:t>]</a:t>
+              <a:t>borg beep</a:t>
             </a:r>
             <a:endParaRPr lang="en-US" sz="1150" dirty="0"/>
           </a:p>
           <a:p>
-            <a:pPr marL="0" indent="0" algn="l">
+            <a:pPr algn="l" indent="0" marL="0">
               <a:lnSpc>
                 <a:spcPct val="112000"/>
               </a:lnSpc>
@@ -14076,29 +13758,18 @@
             <a:r>
               <a:rPr lang="en-US" sz="1150" dirty="0">
                 <a:solidFill>
-                  <a:srgbClr val="9AA8B8"/>
+                  <a:srgbClr val="D7E0EC"/>
                 </a:solidFill>
                 <a:latin typeface="Courier New" pitchFamily="34" charset="0"/>
                 <a:ea typeface="Courier New" pitchFamily="34" charset="-122"/>
                 <a:cs typeface="Courier New" pitchFamily="34" charset="-120"/>
               </a:rPr>
-              <a:t>#  manufacturer -&gt; </a:t>
-            </a:r>
-            <a:r>
-              <a:rPr lang="en-US" sz="1150" dirty="0">
-                <a:solidFill>
-                  <a:srgbClr val="E8552D"/>
-                </a:solidFill>
-                <a:latin typeface="Courier New" pitchFamily="34" charset="0"/>
-                <a:ea typeface="Courier New" pitchFamily="34" charset="-122"/>
-                <a:cs typeface="Courier New" pitchFamily="34" charset="-120"/>
-              </a:rPr>
-              <a:t>Apple</a:t>
+              <a:t> </a:t>
             </a:r>
             <a:endParaRPr lang="en-US" sz="1150" dirty="0"/>
           </a:p>
           <a:p>
-            <a:pPr marL="0" indent="0" algn="l">
+            <a:pPr algn="l" indent="0" marL="0">
               <a:lnSpc>
                 <a:spcPct val="112000"/>
               </a:lnSpc>
@@ -14107,29 +13778,15 @@
             <a:r>
               <a:rPr lang="en-US" sz="1150" dirty="0">
                 <a:solidFill>
-                  <a:srgbClr val="9AA8B8"/>
+                  <a:srgbClr val="D7E0EC"/>
                 </a:solidFill>
                 <a:latin typeface="Courier New" pitchFamily="34" charset="0"/>
                 <a:ea typeface="Courier New" pitchFamily="34" charset="-122"/>
                 <a:cs typeface="Courier New" pitchFamily="34" charset="-120"/>
               </a:rPr>
-              <a:t>#  model        -&gt; </a:t>
-            </a:r>
-            <a:r>
-              <a:rPr lang="en-US" sz="1150" dirty="0">
-                <a:solidFill>
-                  <a:srgbClr val="E8552D"/>
-                </a:solidFill>
-                <a:latin typeface="Courier New" pitchFamily="34" charset="0"/>
-                <a:ea typeface="Courier New" pitchFamily="34" charset="-122"/>
-                <a:cs typeface="Courier New" pitchFamily="34" charset="-120"/>
-              </a:rPr>
-              <a:t>Mac16,12</a:t>
-            </a:r>
-            <a:endParaRPr lang="en-US" sz="1150" dirty="0"/>
-          </a:p>
-          <a:p>
-            <a:pPr marL="0" indent="0" algn="l">
+              <a:t>set bi [</a:t>
+            </a:r>
+            <a:pPr algn="l" indent="0" marL="0">
               <a:lnSpc>
                 <a:spcPct val="112000"/>
               </a:lnSpc>
@@ -14138,18 +13795,15 @@
             <a:r>
               <a:rPr lang="en-US" sz="1150" dirty="0">
                 <a:solidFill>
-                  <a:srgbClr val="D7E0EC"/>
+                  <a:srgbClr val="1FB3A6"/>
                 </a:solidFill>
                 <a:latin typeface="Courier New" pitchFamily="34" charset="0"/>
                 <a:ea typeface="Courier New" pitchFamily="34" charset="-122"/>
                 <a:cs typeface="Courier New" pitchFamily="34" charset="-120"/>
               </a:rPr>
-              <a:t> </a:t>
-            </a:r>
-            <a:endParaRPr lang="en-US" sz="1150" dirty="0"/>
-          </a:p>
-          <a:p>
-            <a:pPr marL="0" indent="0" algn="l">
+              <a:t>borg osbuildinfo</a:t>
+            </a:r>
+            <a:pPr algn="l" indent="0" marL="0">
               <a:lnSpc>
                 <a:spcPct val="112000"/>
               </a:lnSpc>
@@ -14164,6 +13818,120 @@
                 <a:ea typeface="Courier New" pitchFamily="34" charset="-122"/>
                 <a:cs typeface="Courier New" pitchFamily="34" charset="-120"/>
               </a:rPr>
+              <a:t>]</a:t>
+            </a:r>
+            <a:endParaRPr lang="en-US" sz="1150" dirty="0"/>
+          </a:p>
+          <a:p>
+            <a:pPr algn="l" indent="0" marL="0">
+              <a:lnSpc>
+                <a:spcPct val="112000"/>
+              </a:lnSpc>
+              <a:buNone/>
+            </a:pPr>
+            <a:r>
+              <a:rPr lang="en-US" sz="1150" dirty="0">
+                <a:solidFill>
+                  <a:srgbClr val="9AA8B8"/>
+                </a:solidFill>
+                <a:latin typeface="Courier New" pitchFamily="34" charset="0"/>
+                <a:ea typeface="Courier New" pitchFamily="34" charset="-122"/>
+                <a:cs typeface="Courier New" pitchFamily="34" charset="-120"/>
+              </a:rPr>
+              <a:t>#  manufacturer -&gt; </a:t>
+            </a:r>
+            <a:pPr algn="l" indent="0" marL="0">
+              <a:lnSpc>
+                <a:spcPct val="112000"/>
+              </a:lnSpc>
+              <a:buNone/>
+            </a:pPr>
+            <a:r>
+              <a:rPr lang="en-US" sz="1150" dirty="0">
+                <a:solidFill>
+                  <a:srgbClr val="E8552D"/>
+                </a:solidFill>
+                <a:latin typeface="Courier New" pitchFamily="34" charset="0"/>
+                <a:ea typeface="Courier New" pitchFamily="34" charset="-122"/>
+                <a:cs typeface="Courier New" pitchFamily="34" charset="-120"/>
+              </a:rPr>
+              <a:t>Apple</a:t>
+            </a:r>
+            <a:endParaRPr lang="en-US" sz="1150" dirty="0"/>
+          </a:p>
+          <a:p>
+            <a:pPr algn="l" indent="0" marL="0">
+              <a:lnSpc>
+                <a:spcPct val="112000"/>
+              </a:lnSpc>
+              <a:buNone/>
+            </a:pPr>
+            <a:r>
+              <a:rPr lang="en-US" sz="1150" dirty="0">
+                <a:solidFill>
+                  <a:srgbClr val="9AA8B8"/>
+                </a:solidFill>
+                <a:latin typeface="Courier New" pitchFamily="34" charset="0"/>
+                <a:ea typeface="Courier New" pitchFamily="34" charset="-122"/>
+                <a:cs typeface="Courier New" pitchFamily="34" charset="-120"/>
+              </a:rPr>
+              <a:t>#  model        -&gt; </a:t>
+            </a:r>
+            <a:pPr algn="l" indent="0" marL="0">
+              <a:lnSpc>
+                <a:spcPct val="112000"/>
+              </a:lnSpc>
+              <a:buNone/>
+            </a:pPr>
+            <a:r>
+              <a:rPr lang="en-US" sz="1150" dirty="0">
+                <a:solidFill>
+                  <a:srgbClr val="E8552D"/>
+                </a:solidFill>
+                <a:latin typeface="Courier New" pitchFamily="34" charset="0"/>
+                <a:ea typeface="Courier New" pitchFamily="34" charset="-122"/>
+                <a:cs typeface="Courier New" pitchFamily="34" charset="-120"/>
+              </a:rPr>
+              <a:t>Mac16,12</a:t>
+            </a:r>
+            <a:endParaRPr lang="en-US" sz="1150" dirty="0"/>
+          </a:p>
+          <a:p>
+            <a:pPr algn="l" indent="0" marL="0">
+              <a:lnSpc>
+                <a:spcPct val="112000"/>
+              </a:lnSpc>
+              <a:buNone/>
+            </a:pPr>
+            <a:r>
+              <a:rPr lang="en-US" sz="1150" dirty="0">
+                <a:solidFill>
+                  <a:srgbClr val="D7E0EC"/>
+                </a:solidFill>
+                <a:latin typeface="Courier New" pitchFamily="34" charset="0"/>
+                <a:ea typeface="Courier New" pitchFamily="34" charset="-122"/>
+                <a:cs typeface="Courier New" pitchFamily="34" charset="-120"/>
+              </a:rPr>
+              <a:t> </a:t>
+            </a:r>
+            <a:endParaRPr lang="en-US" sz="1150" dirty="0"/>
+          </a:p>
+          <a:p>
+            <a:pPr algn="l" indent="0" marL="0">
+              <a:lnSpc>
+                <a:spcPct val="112000"/>
+              </a:lnSpc>
+              <a:buNone/>
+            </a:pPr>
+            <a:r>
+              <a:rPr lang="en-US" sz="1150" dirty="0">
+                <a:solidFill>
+                  <a:srgbClr val="D7E0EC"/>
+                </a:solidFill>
+                <a:latin typeface="Courier New" pitchFamily="34" charset="0"/>
+                <a:ea typeface="Courier New" pitchFamily="34" charset="-122"/>
+                <a:cs typeface="Courier New" pitchFamily="34" charset="-120"/>
+              </a:rPr>
               <a:t>borg usbdevices</a:t>
             </a:r>
             <a:endParaRPr lang="en-US" sz="1150" dirty="0"/>
@@ -14191,7 +13959,7 @@
           <a:bodyPr wrap="square" lIns="0" tIns="0" rIns="0" bIns="0" rtlCol="0" anchor="t"/>
           <a:lstStyle/>
           <a:p>
-            <a:pPr marL="203200" indent="-203200" algn="l">
+            <a:pPr algn="l" marL="203200" indent="-203200">
               <a:spcAft>
                 <a:spcPts val="800"/>
               </a:spcAft>
@@ -14212,7 +13980,7 @@
             <a:endParaRPr lang="en-US" sz="1300" dirty="0"/>
           </a:p>
           <a:p>
-            <a:pPr marL="203200" indent="-203200" algn="l">
+            <a:pPr algn="l" marL="203200" indent="-203200">
               <a:spcAft>
                 <a:spcPts val="800"/>
               </a:spcAft>
@@ -14233,7 +14001,7 @@
             <a:endParaRPr lang="en-US" sz="1300" dirty="0"/>
           </a:p>
           <a:p>
-            <a:pPr marL="203200" indent="-203200" algn="l">
+            <a:pPr algn="l" marL="203200" indent="-203200">
               <a:spcAft>
                 <a:spcPts val="800"/>
               </a:spcAft>
@@ -14254,7 +14022,7 @@
             <a:endParaRPr lang="en-US" sz="1300" dirty="0"/>
           </a:p>
           <a:p>
-            <a:pPr marL="203200" indent="-203200" algn="l">
+            <a:pPr algn="l" marL="203200" indent="-203200">
               <a:spcAft>
                 <a:spcPts val="800"/>
               </a:spcAft>
@@ -14297,7 +14065,7 @@
           <a:bodyPr wrap="square" lIns="0" tIns="0" rIns="0" bIns="0" rtlCol="0" anchor="ctr"/>
           <a:lstStyle/>
           <a:p>
-            <a:pPr marL="0" indent="0" algn="l">
+            <a:pPr algn="l" indent="0" marL="0">
               <a:buNone/>
             </a:pPr>
             <a:r>
@@ -14311,6 +14079,9 @@
               </a:rPr>
               <a:t>EuroTcl 2026</a:t>
             </a:r>
+            <a:pPr algn="l" indent="0" marL="0">
+              <a:buNone/>
+            </a:pPr>
             <a:r>
               <a:rPr lang="en-US" sz="900" dirty="0">
                 <a:solidFill>
@@ -14347,7 +14118,7 @@
           <a:bodyPr wrap="square" lIns="0" tIns="0" rIns="0" bIns="0" rtlCol="0" anchor="ctr"/>
           <a:lstStyle/>
           <a:p>
-            <a:pPr marL="0" indent="0" algn="r">
+            <a:pPr algn="r" indent="0" marL="0">
               <a:buNone/>
             </a:pPr>
             <a:r>
@@ -14381,7 +14152,6 @@
         <a:solidFill>
           <a:srgbClr val="000000"/>
         </a:solidFill>
-        <a:effectLst/>
       </p:bgPr>
     </p:bg>
     <p:spTree>
@@ -14419,11 +14189,11 @@
           <a:bodyPr wrap="square" lIns="0" tIns="0" rIns="0" bIns="0" rtlCol="0" anchor="ctr"/>
           <a:lstStyle/>
           <a:p>
-            <a:pPr marL="0" indent="0" algn="l">
+            <a:pPr algn="l" indent="0" marL="0">
               <a:buNone/>
             </a:pPr>
             <a:r>
-              <a:rPr lang="en-US" sz="1200" b="1" kern="0" spc="250" dirty="0">
+              <a:rPr lang="en-US" sz="1200" b="1" spc="250" kern="0" dirty="0">
                 <a:solidFill>
                   <a:srgbClr val="E8552D"/>
                 </a:solidFill>
@@ -14458,7 +14228,7 @@
           <a:bodyPr wrap="square" lIns="0" tIns="0" rIns="0" bIns="0" rtlCol="0" anchor="t"/>
           <a:lstStyle/>
           <a:p>
-            <a:pPr marL="0" indent="0" algn="l">
+            <a:pPr algn="l" indent="0" marL="0">
               <a:lnSpc>
                 <a:spcPct val="98000"/>
               </a:lnSpc>
@@ -14505,20 +14275,13 @@
             <a:prstDash val="solid"/>
           </a:ln>
           <a:effectLst>
-            <a:outerShdw blurRad="101600" dist="38100" dir="5400000" algn="bl" rotWithShape="0">
+            <a:outerShdw sx="100000" sy="100000" kx="0" ky="0" algn="bl" rotWithShape="0" blurRad="101600" dist="38100" dir="5400000">
               <a:srgbClr val="000000">
                 <a:alpha val="10000"/>
               </a:srgbClr>
             </a:outerShdw>
           </a:effectLst>
         </p:spPr>
-        <p:txBody>
-          <a:bodyPr/>
-          <a:lstStyle/>
-          <a:p>
-            <a:endParaRPr lang="en-US"/>
-          </a:p>
-        </p:txBody>
       </p:sp>
       <p:sp>
         <p:nvSpPr>
@@ -14539,31 +14302,24 @@
           </a:solidFill>
           <a:ln/>
           <a:effectLst>
-            <a:outerShdw blurRad="76200" dist="25400" dir="5400000" algn="bl" rotWithShape="0">
+            <a:outerShdw sx="100000" sy="100000" kx="0" ky="0" algn="bl" rotWithShape="0" blurRad="76200" dist="25400" dir="5400000">
               <a:srgbClr val="000000">
                 <a:alpha val="18000"/>
               </a:srgbClr>
             </a:outerShdw>
           </a:effectLst>
         </p:spPr>
-        <p:txBody>
-          <a:bodyPr/>
-          <a:lstStyle/>
-          <a:p>
-            <a:endParaRPr lang="en-US"/>
-          </a:p>
-        </p:txBody>
       </p:sp>
       <p:pic>
         <p:nvPicPr>
-          <p:cNvPr id="6" name="Image 0" descr="preencoded.png"/>
+          <p:cNvPr id="6" name="Image 0" descr="preencoded.png">    </p:cNvPr>
           <p:cNvPicPr>
             <a:picLocks noChangeAspect="1"/>
           </p:cNvPicPr>
           <p:nvPr/>
         </p:nvPicPr>
         <p:blipFill>
-          <a:blip r:embed="rId3"/>
+          <a:blip r:embed="rId1"/>
           <a:stretch>
             <a:fillRect/>
           </a:stretch>
@@ -14599,7 +14355,7 @@
           <a:bodyPr wrap="square" lIns="0" tIns="0" rIns="0" bIns="0" rtlCol="0" anchor="ctr"/>
           <a:lstStyle/>
           <a:p>
-            <a:pPr marL="0" indent="0" algn="l">
+            <a:pPr algn="l" indent="0" marL="0">
               <a:buNone/>
             </a:pPr>
             <a:r>
@@ -14638,7 +14394,7 @@
           <a:bodyPr wrap="square" lIns="0" tIns="0" rIns="0" bIns="0" rtlCol="0" anchor="t"/>
           <a:lstStyle/>
           <a:p>
-            <a:pPr marL="0" indent="0" algn="l">
+            <a:pPr algn="l" indent="0" marL="0">
               <a:lnSpc>
                 <a:spcPct val="102000"/>
               </a:lnSpc>
@@ -14685,20 +14441,13 @@
             <a:prstDash val="solid"/>
           </a:ln>
           <a:effectLst>
-            <a:outerShdw blurRad="101600" dist="38100" dir="5400000" algn="bl" rotWithShape="0">
+            <a:outerShdw sx="100000" sy="100000" kx="0" ky="0" algn="bl" rotWithShape="0" blurRad="101600" dist="38100" dir="5400000">
               <a:srgbClr val="000000">
                 <a:alpha val="10000"/>
               </a:srgbClr>
             </a:outerShdw>
           </a:effectLst>
         </p:spPr>
-        <p:txBody>
-          <a:bodyPr/>
-          <a:lstStyle/>
-          <a:p>
-            <a:endParaRPr lang="en-US"/>
-          </a:p>
-        </p:txBody>
       </p:sp>
       <p:sp>
         <p:nvSpPr>
@@ -14719,31 +14468,24 @@
           </a:solidFill>
           <a:ln/>
           <a:effectLst>
-            <a:outerShdw blurRad="76200" dist="25400" dir="5400000" algn="bl" rotWithShape="0">
+            <a:outerShdw sx="100000" sy="100000" kx="0" ky="0" algn="bl" rotWithShape="0" blurRad="76200" dist="25400" dir="5400000">
               <a:srgbClr val="000000">
                 <a:alpha val="18000"/>
               </a:srgbClr>
             </a:outerShdw>
           </a:effectLst>
         </p:spPr>
-        <p:txBody>
-          <a:bodyPr/>
-          <a:lstStyle/>
-          <a:p>
-            <a:endParaRPr lang="en-US"/>
-          </a:p>
-        </p:txBody>
       </p:sp>
       <p:pic>
         <p:nvPicPr>
-          <p:cNvPr id="11" name="Image 1" descr="preencoded.png"/>
+          <p:cNvPr id="11" name="Image 1" descr="preencoded.png">    </p:cNvPr>
           <p:cNvPicPr>
             <a:picLocks noChangeAspect="1"/>
           </p:cNvPicPr>
           <p:nvPr/>
         </p:nvPicPr>
         <p:blipFill>
-          <a:blip r:embed="rId4"/>
+          <a:blip r:embed="rId2"/>
           <a:stretch>
             <a:fillRect/>
           </a:stretch>
@@ -14779,7 +14521,7 @@
           <a:bodyPr wrap="square" lIns="0" tIns="0" rIns="0" bIns="0" rtlCol="0" anchor="ctr"/>
           <a:lstStyle/>
           <a:p>
-            <a:pPr marL="0" indent="0" algn="l">
+            <a:pPr algn="l" indent="0" marL="0">
               <a:buNone/>
             </a:pPr>
             <a:r>
@@ -14818,7 +14560,7 @@
           <a:bodyPr wrap="square" lIns="0" tIns="0" rIns="0" bIns="0" rtlCol="0" anchor="t"/>
           <a:lstStyle/>
           <a:p>
-            <a:pPr marL="0" indent="0" algn="l">
+            <a:pPr algn="l" indent="0" marL="0">
               <a:lnSpc>
                 <a:spcPct val="102000"/>
               </a:lnSpc>
@@ -14865,20 +14607,13 @@
             <a:prstDash val="solid"/>
           </a:ln>
           <a:effectLst>
-            <a:outerShdw blurRad="101600" dist="38100" dir="5400000" algn="bl" rotWithShape="0">
+            <a:outerShdw sx="100000" sy="100000" kx="0" ky="0" algn="bl" rotWithShape="0" blurRad="101600" dist="38100" dir="5400000">
               <a:srgbClr val="000000">
                 <a:alpha val="10000"/>
               </a:srgbClr>
             </a:outerShdw>
           </a:effectLst>
         </p:spPr>
-        <p:txBody>
-          <a:bodyPr/>
-          <a:lstStyle/>
-          <a:p>
-            <a:endParaRPr lang="en-US"/>
-          </a:p>
-        </p:txBody>
       </p:sp>
       <p:sp>
         <p:nvSpPr>
@@ -14899,31 +14634,24 @@
           </a:solidFill>
           <a:ln/>
           <a:effectLst>
-            <a:outerShdw blurRad="76200" dist="25400" dir="5400000" algn="bl" rotWithShape="0">
+            <a:outerShdw sx="100000" sy="100000" kx="0" ky="0" algn="bl" rotWithShape="0" blurRad="76200" dist="25400" dir="5400000">
               <a:srgbClr val="000000">
                 <a:alpha val="18000"/>
               </a:srgbClr>
             </a:outerShdw>
           </a:effectLst>
         </p:spPr>
-        <p:txBody>
-          <a:bodyPr/>
-          <a:lstStyle/>
-          <a:p>
-            <a:endParaRPr lang="en-US"/>
-          </a:p>
-        </p:txBody>
       </p:sp>
       <p:pic>
         <p:nvPicPr>
-          <p:cNvPr id="16" name="Image 2" descr="preencoded.png"/>
+          <p:cNvPr id="16" name="Image 2" descr="preencoded.png">    </p:cNvPr>
           <p:cNvPicPr>
             <a:picLocks noChangeAspect="1"/>
           </p:cNvPicPr>
           <p:nvPr/>
         </p:nvPicPr>
         <p:blipFill>
-          <a:blip r:embed="rId5"/>
+          <a:blip r:embed="rId3"/>
           <a:stretch>
             <a:fillRect/>
           </a:stretch>
@@ -14959,7 +14687,7 @@
           <a:bodyPr wrap="square" lIns="0" tIns="0" rIns="0" bIns="0" rtlCol="0" anchor="ctr"/>
           <a:lstStyle/>
           <a:p>
-            <a:pPr marL="0" indent="0" algn="l">
+            <a:pPr algn="l" indent="0" marL="0">
               <a:buNone/>
             </a:pPr>
             <a:r>
@@ -14998,7 +14726,7 @@
           <a:bodyPr wrap="square" lIns="0" tIns="0" rIns="0" bIns="0" rtlCol="0" anchor="t"/>
           <a:lstStyle/>
           <a:p>
-            <a:pPr marL="0" indent="0" algn="l">
+            <a:pPr algn="l" indent="0" marL="0">
               <a:lnSpc>
                 <a:spcPct val="102000"/>
               </a:lnSpc>
@@ -15045,20 +14773,13 @@
             <a:prstDash val="solid"/>
           </a:ln>
           <a:effectLst>
-            <a:outerShdw blurRad="101600" dist="38100" dir="5400000" algn="bl" rotWithShape="0">
+            <a:outerShdw sx="100000" sy="100000" kx="0" ky="0" algn="bl" rotWithShape="0" blurRad="101600" dist="38100" dir="5400000">
               <a:srgbClr val="000000">
                 <a:alpha val="10000"/>
               </a:srgbClr>
             </a:outerShdw>
           </a:effectLst>
         </p:spPr>
-        <p:txBody>
-          <a:bodyPr/>
-          <a:lstStyle/>
-          <a:p>
-            <a:endParaRPr lang="en-US"/>
-          </a:p>
-        </p:txBody>
       </p:sp>
       <p:sp>
         <p:nvSpPr>
@@ -15079,31 +14800,24 @@
           </a:solidFill>
           <a:ln/>
           <a:effectLst>
-            <a:outerShdw blurRad="76200" dist="25400" dir="5400000" algn="bl" rotWithShape="0">
+            <a:outerShdw sx="100000" sy="100000" kx="0" ky="0" algn="bl" rotWithShape="0" blurRad="76200" dist="25400" dir="5400000">
               <a:srgbClr val="000000">
                 <a:alpha val="18000"/>
               </a:srgbClr>
             </a:outerShdw>
           </a:effectLst>
         </p:spPr>
-        <p:txBody>
-          <a:bodyPr/>
-          <a:lstStyle/>
-          <a:p>
-            <a:endParaRPr lang="en-US"/>
-          </a:p>
-        </p:txBody>
       </p:sp>
       <p:pic>
         <p:nvPicPr>
-          <p:cNvPr id="21" name="Image 3" descr="preencoded.png"/>
+          <p:cNvPr id="21" name="Image 3" descr="preencoded.png">    </p:cNvPr>
           <p:cNvPicPr>
             <a:picLocks noChangeAspect="1"/>
           </p:cNvPicPr>
           <p:nvPr/>
         </p:nvPicPr>
         <p:blipFill>
-          <a:blip r:embed="rId6"/>
+          <a:blip r:embed="rId4"/>
           <a:stretch>
             <a:fillRect/>
           </a:stretch>
@@ -15139,7 +14853,7 @@
           <a:bodyPr wrap="square" lIns="0" tIns="0" rIns="0" bIns="0" rtlCol="0" anchor="ctr"/>
           <a:lstStyle/>
           <a:p>
-            <a:pPr marL="0" indent="0" algn="l">
+            <a:pPr algn="l" indent="0" marL="0">
               <a:buNone/>
             </a:pPr>
             <a:r>
@@ -15178,7 +14892,7 @@
           <a:bodyPr wrap="square" lIns="0" tIns="0" rIns="0" bIns="0" rtlCol="0" anchor="t"/>
           <a:lstStyle/>
           <a:p>
-            <a:pPr marL="0" indent="0" algn="l">
+            <a:pPr algn="l" indent="0" marL="0">
               <a:lnSpc>
                 <a:spcPct val="102000"/>
               </a:lnSpc>
@@ -15220,7 +14934,7 @@
           <a:bodyPr wrap="square" lIns="0" tIns="0" rIns="0" bIns="0" rtlCol="0" anchor="ctr"/>
           <a:lstStyle/>
           <a:p>
-            <a:pPr marL="0" indent="0" algn="l">
+            <a:pPr algn="l" indent="0" marL="0">
               <a:buNone/>
             </a:pPr>
             <a:r>
@@ -15234,6 +14948,9 @@
               </a:rPr>
               <a:t>EuroTcl 2026</a:t>
             </a:r>
+            <a:pPr algn="l" indent="0" marL="0">
+              <a:buNone/>
+            </a:pPr>
             <a:r>
               <a:rPr lang="en-US" sz="900" dirty="0">
                 <a:solidFill>
@@ -15270,7 +14987,7 @@
           <a:bodyPr wrap="square" lIns="0" tIns="0" rIns="0" bIns="0" rtlCol="0" anchor="ctr"/>
           <a:lstStyle/>
           <a:p>
-            <a:pPr marL="0" indent="0" algn="r">
+            <a:pPr algn="r" indent="0" marL="0">
               <a:buNone/>
             </a:pPr>
             <a:r>
@@ -15589,319 +15306,4 @@
     </a:ext>
   </a:extLst>
 </a:theme>
-</file>
-
-<file path=ppt/theme/theme2.xml><?xml version="1.0" encoding="utf-8"?>
-<a:theme xmlns:a="http://schemas.openxmlformats.org/drawingml/2006/main" name="Office Theme">
-  <a:themeElements>
-    <a:clrScheme name="Office">
-      <a:dk1>
-        <a:sysClr val="windowText" lastClr="000000"/>
-      </a:dk1>
-      <a:lt1>
-        <a:sysClr val="window" lastClr="FFFFFF"/>
-      </a:lt1>
-      <a:dk2>
-        <a:srgbClr val="0E2841"/>
-      </a:dk2>
-      <a:lt2>
-        <a:srgbClr val="E8E8E8"/>
-      </a:lt2>
-      <a:accent1>
-        <a:srgbClr val="156082"/>
-      </a:accent1>
-      <a:accent2>
-        <a:srgbClr val="E97132"/>
-      </a:accent2>
-      <a:accent3>
-        <a:srgbClr val="196B24"/>
-      </a:accent3>
-      <a:accent4>
-        <a:srgbClr val="0F9ED5"/>
-      </a:accent4>
-      <a:accent5>
-        <a:srgbClr val="A02B93"/>
-      </a:accent5>
-      <a:accent6>
-        <a:srgbClr val="4EA72E"/>
-      </a:accent6>
-      <a:hlink>
-        <a:srgbClr val="467886"/>
-      </a:hlink>
-      <a:folHlink>
-        <a:srgbClr val="96607D"/>
-      </a:folHlink>
-    </a:clrScheme>
-    <a:fontScheme name="Office">
-      <a:majorFont>
-        <a:latin typeface="Aptos Display" panose="02110004020202020204"/>
-        <a:ea typeface=""/>
-        <a:cs typeface=""/>
-        <a:font script="Jpan" typeface="游ゴシック Light"/>
-        <a:font script="Hang" typeface="맑은 고딕"/>
-        <a:font script="Hans" typeface="等线 Light"/>
-        <a:font script="Hant" typeface="新細明體"/>
-        <a:font script="Arab" typeface="Times New Roman"/>
-        <a:font script="Hebr" typeface="Times New Roman"/>
-        <a:font script="Thai" typeface="Angsana New"/>
-        <a:font script="Ethi" typeface="Nyala"/>
-        <a:font script="Beng" typeface="Vrinda"/>
-        <a:font script="Gujr" typeface="Shruti"/>
-        <a:font script="Khmr" typeface="MoolBoran"/>
-        <a:font script="Knda" typeface="Tunga"/>
-        <a:font script="Guru" typeface="Raavi"/>
-        <a:font script="Cans" typeface="Euphemia"/>
-        <a:font script="Cher" typeface="Plantagenet Cherokee"/>
-        <a:font script="Yiii" typeface="Microsoft Yi Baiti"/>
-        <a:font script="Tibt" typeface="Microsoft Himalaya"/>
-        <a:font script="Thaa" typeface="MV Boli"/>
-        <a:font script="Deva" typeface="Mangal"/>
-        <a:font script="Telu" typeface="Gautami"/>
-        <a:font script="Taml" typeface="Latha"/>
-        <a:font script="Syrc" typeface="Estrangelo Edessa"/>
-        <a:font script="Orya" typeface="Kalinga"/>
-        <a:font script="Mlym" typeface="Kartika"/>
-        <a:font script="Laoo" typeface="DokChampa"/>
-        <a:font script="Sinh" typeface="Iskoola Pota"/>
-        <a:font script="Mong" typeface="Mongolian Baiti"/>
-        <a:font script="Viet" typeface="Times New Roman"/>
-        <a:font script="Uigh" typeface="Microsoft Uighur"/>
-        <a:font script="Geor" typeface="Sylfaen"/>
-        <a:font script="Armn" typeface="Arial"/>
-        <a:font script="Bugi" typeface="Leelawadee UI"/>
-        <a:font script="Bopo" typeface="Microsoft JhengHei"/>
-        <a:font script="Java" typeface="Javanese Text"/>
-        <a:font script="Lisu" typeface="Segoe UI"/>
-        <a:font script="Mymr" typeface="Myanmar Text"/>
-        <a:font script="Nkoo" typeface="Ebrima"/>
-        <a:font script="Olck" typeface="Nirmala UI"/>
-        <a:font script="Osma" typeface="Ebrima"/>
-        <a:font script="Phag" typeface="Phagspa"/>
-        <a:font script="Syrn" typeface="Estrangelo Edessa"/>
-        <a:font script="Syrj" typeface="Estrangelo Edessa"/>
-        <a:font script="Syre" typeface="Estrangelo Edessa"/>
-        <a:font script="Sora" typeface="Nirmala UI"/>
-        <a:font script="Tale" typeface="Microsoft Tai Le"/>
-        <a:font script="Talu" typeface="Microsoft New Tai Lue"/>
-        <a:font script="Tfng" typeface="Ebrima"/>
-      </a:majorFont>
-      <a:minorFont>
-        <a:latin typeface="Aptos" panose="02110004020202020204"/>
-        <a:ea typeface=""/>
-        <a:cs typeface=""/>
-        <a:font script="Jpan" typeface="游ゴシック"/>
-        <a:font script="Hang" typeface="맑은 고딕"/>
-        <a:font script="Hans" typeface="等线"/>
-        <a:font script="Hant" typeface="新細明體"/>
-        <a:font script="Arab" typeface="Arial"/>
-        <a:font script="Hebr" typeface="Arial"/>
-        <a:font script="Thai" typeface="Cordia New"/>
-        <a:font script="Ethi" typeface="Nyala"/>
-        <a:font script="Beng" typeface="Vrinda"/>
-        <a:font script="Gujr" typeface="Shruti"/>
-        <a:font script="Khmr" typeface="DaunPenh"/>
-        <a:font script="Knda" typeface="Tunga"/>
-        <a:font script="Guru" typeface="Raavi"/>
-        <a:font script="Cans" typeface="Euphemia"/>
-        <a:font script="Cher" typeface="Plantagenet Cherokee"/>
-        <a:font script="Yiii" typeface="Microsoft Yi Baiti"/>
-        <a:font script="Tibt" typeface="Microsoft Himalaya"/>
-        <a:font script="Thaa" typeface="MV Boli"/>
-        <a:font script="Deva" typeface="Mangal"/>
-        <a:font script="Telu" typeface="Gautami"/>
-        <a:font script="Taml" typeface="Latha"/>
-        <a:font script="Syrc" typeface="Estrangelo Edessa"/>
-        <a:font script="Orya" typeface="Kalinga"/>
-        <a:font script="Mlym" typeface="Kartika"/>
-        <a:font script="Laoo" typeface="DokChampa"/>
-        <a:font script="Sinh" typeface="Iskoola Pota"/>
-        <a:font script="Mong" typeface="Mongolian Baiti"/>
-        <a:font script="Viet" typeface="Arial"/>
-        <a:font script="Uigh" typeface="Microsoft Uighur"/>
-        <a:font script="Geor" typeface="Sylfaen"/>
-        <a:font script="Armn" typeface="Arial"/>
-        <a:font script="Bugi" typeface="Leelawadee UI"/>
-        <a:font script="Bopo" typeface="Microsoft JhengHei"/>
-        <a:font script="Java" typeface="Javanese Text"/>
-        <a:font script="Lisu" typeface="Segoe UI"/>
-        <a:font script="Mymr" typeface="Myanmar Text"/>
-        <a:font script="Nkoo" typeface="Ebrima"/>
-        <a:font script="Olck" typeface="Nirmala UI"/>
-        <a:font script="Osma" typeface="Ebrima"/>
-        <a:font script="Phag" typeface="Phagspa"/>
-        <a:font script="Syrn" typeface="Estrangelo Edessa"/>
-        <a:font script="Syrj" typeface="Estrangelo Edessa"/>
-        <a:font script="Syre" typeface="Estrangelo Edessa"/>
-        <a:font script="Sora" typeface="Nirmala UI"/>
-        <a:font script="Tale" typeface="Microsoft Tai Le"/>
-        <a:font script="Talu" typeface="Microsoft New Tai Lue"/>
-        <a:font script="Tfng" typeface="Ebrima"/>
-      </a:minorFont>
-    </a:fontScheme>
-    <a:fmtScheme name="Office">
-      <a:fillStyleLst>
-        <a:solidFill>
-          <a:schemeClr val="phClr"/>
-        </a:solidFill>
-        <a:gradFill rotWithShape="1">
-          <a:gsLst>
-            <a:gs pos="0">
-              <a:schemeClr val="phClr">
-                <a:lumMod val="110000"/>
-                <a:satMod val="105000"/>
-                <a:tint val="67000"/>
-              </a:schemeClr>
-            </a:gs>
-            <a:gs pos="50000">
-              <a:schemeClr val="phClr">
-                <a:lumMod val="105000"/>
-                <a:satMod val="103000"/>
-                <a:tint val="73000"/>
-              </a:schemeClr>
-            </a:gs>
-            <a:gs pos="100000">
-              <a:schemeClr val="phClr">
-                <a:lumMod val="105000"/>
-                <a:satMod val="109000"/>
-                <a:tint val="81000"/>
-              </a:schemeClr>
-            </a:gs>
-          </a:gsLst>
-          <a:lin ang="5400000" scaled="0"/>
-        </a:gradFill>
-        <a:gradFill rotWithShape="1">
-          <a:gsLst>
-            <a:gs pos="0">
-              <a:schemeClr val="phClr">
-                <a:satMod val="103000"/>
-                <a:lumMod val="102000"/>
-                <a:tint val="94000"/>
-              </a:schemeClr>
-            </a:gs>
-            <a:gs pos="50000">
-              <a:schemeClr val="phClr">
-                <a:satMod val="110000"/>
-                <a:lumMod val="100000"/>
-                <a:shade val="100000"/>
-              </a:schemeClr>
-            </a:gs>
-            <a:gs pos="100000">
-              <a:schemeClr val="phClr">
-                <a:lumMod val="99000"/>
-                <a:satMod val="120000"/>
-                <a:shade val="78000"/>
-              </a:schemeClr>
-            </a:gs>
-          </a:gsLst>
-          <a:lin ang="5400000" scaled="0"/>
-        </a:gradFill>
-      </a:fillStyleLst>
-      <a:lnStyleLst>
-        <a:ln w="12700" cap="flat" cmpd="sng" algn="ctr">
-          <a:solidFill>
-            <a:schemeClr val="phClr"/>
-          </a:solidFill>
-          <a:prstDash val="solid"/>
-          <a:miter lim="800000"/>
-        </a:ln>
-        <a:ln w="19050" cap="flat" cmpd="sng" algn="ctr">
-          <a:solidFill>
-            <a:schemeClr val="phClr"/>
-          </a:solidFill>
-          <a:prstDash val="solid"/>
-          <a:miter lim="800000"/>
-        </a:ln>
-        <a:ln w="25400" cap="flat" cmpd="sng" algn="ctr">
-          <a:solidFill>
-            <a:schemeClr val="phClr"/>
-          </a:solidFill>
-          <a:prstDash val="solid"/>
-          <a:miter lim="800000"/>
-        </a:ln>
-      </a:lnStyleLst>
-      <a:effectStyleLst>
-        <a:effectStyle>
-          <a:effectLst/>
-        </a:effectStyle>
-        <a:effectStyle>
-          <a:effectLst/>
-        </a:effectStyle>
-        <a:effectStyle>
-          <a:effectLst>
-            <a:outerShdw blurRad="57150" dist="19050" dir="5400000" algn="ctr" rotWithShape="0">
-              <a:srgbClr val="000000">
-                <a:alpha val="63000"/>
-              </a:srgbClr>
-            </a:outerShdw>
-          </a:effectLst>
-        </a:effectStyle>
-      </a:effectStyleLst>
-      <a:bgFillStyleLst>
-        <a:solidFill>
-          <a:schemeClr val="phClr"/>
-        </a:solidFill>
-        <a:solidFill>
-          <a:schemeClr val="phClr">
-            <a:tint val="95000"/>
-            <a:satMod val="170000"/>
-          </a:schemeClr>
-        </a:solidFill>
-        <a:gradFill rotWithShape="1">
-          <a:gsLst>
-            <a:gs pos="0">
-              <a:schemeClr val="phClr">
-                <a:tint val="93000"/>
-                <a:satMod val="150000"/>
-                <a:shade val="98000"/>
-                <a:lumMod val="102000"/>
-              </a:schemeClr>
-            </a:gs>
-            <a:gs pos="50000">
-              <a:schemeClr val="phClr">
-                <a:tint val="98000"/>
-                <a:satMod val="130000"/>
-                <a:shade val="90000"/>
-                <a:lumMod val="103000"/>
-              </a:schemeClr>
-            </a:gs>
-            <a:gs pos="100000">
-              <a:schemeClr val="phClr">
-                <a:shade val="63000"/>
-                <a:satMod val="120000"/>
-              </a:schemeClr>
-            </a:gs>
-          </a:gsLst>
-          <a:lin ang="5400000" scaled="0"/>
-        </a:gradFill>
-      </a:bgFillStyleLst>
-    </a:fmtScheme>
-  </a:themeElements>
-  <a:objectDefaults>
-    <a:lnDef>
-      <a:spPr/>
-      <a:bodyPr/>
-      <a:lstStyle/>
-      <a:style>
-        <a:lnRef idx="2">
-          <a:schemeClr val="accent1"/>
-        </a:lnRef>
-        <a:fillRef idx="0">
-          <a:schemeClr val="accent1"/>
-        </a:fillRef>
-        <a:effectRef idx="1">
-          <a:schemeClr val="accent1"/>
-        </a:effectRef>
-        <a:fontRef idx="minor">
-          <a:schemeClr val="tx1"/>
-        </a:fontRef>
-      </a:style>
-    </a:lnDef>
-  </a:objectDefaults>
-  <a:extraClrSchemeLst/>
-  <a:extLst>
-    <a:ext uri="{05A4C25C-085E-4340-85A3-A5531E510DB2}">
-      <thm15:themeFamily xmlns:thm15="http://schemas.microsoft.com/office/thememl/2012/main" name="Office Theme" id="{2E142A2C-CD16-42D6-873A-C26D2A0506FA}" vid="{1BDDFF52-6CD6-40A5-AB3C-68EB2F1E4D0A}"/>
-    </a:ext>
-  </a:extLst>
-</a:theme>
 </file>